--- a/docs/pptx/auc3/ritu-auc3-linsubhr-sens-akikdigo_10pct.pptx
+++ b/docs/pptx/auc3/ritu-auc3-linsubhr-sens-akikdigo_10pct.pptx
@@ -2443,7 +2443,7 @@
           </p:nvSpPr>
           <p:spPr>
             <a:xfrm>
-              <a:off x="1342929" y="2073503"/>
+              <a:off x="1343231" y="2073503"/>
               <a:ext cx="0" cy="3649639"/>
             </a:xfrm>
             <a:custGeom>
@@ -2486,7 +2486,7 @@
           </p:nvSpPr>
           <p:spPr>
             <a:xfrm>
-              <a:off x="2182565" y="2073503"/>
+              <a:off x="2181282" y="2073503"/>
               <a:ext cx="0" cy="3649639"/>
             </a:xfrm>
             <a:custGeom>
@@ -2529,7 +2529,7 @@
           </p:nvSpPr>
           <p:spPr>
             <a:xfrm>
-              <a:off x="3022201" y="2073503"/>
+              <a:off x="3019333" y="2073503"/>
               <a:ext cx="0" cy="3649639"/>
             </a:xfrm>
             <a:custGeom>
@@ -2572,7 +2572,7 @@
           </p:nvSpPr>
           <p:spPr>
             <a:xfrm>
-              <a:off x="3861838" y="2073503"/>
+              <a:off x="3857383" y="2073503"/>
               <a:ext cx="0" cy="3649639"/>
             </a:xfrm>
             <a:custGeom>
@@ -2615,7 +2615,7 @@
           </p:nvSpPr>
           <p:spPr>
             <a:xfrm>
-              <a:off x="4701474" y="2073503"/>
+              <a:off x="4695434" y="2073503"/>
               <a:ext cx="0" cy="3649639"/>
             </a:xfrm>
             <a:custGeom>
@@ -2658,7 +2658,7 @@
           </p:nvSpPr>
           <p:spPr>
             <a:xfrm>
-              <a:off x="5541110" y="2073503"/>
+              <a:off x="5533485" y="2073503"/>
               <a:ext cx="0" cy="3649639"/>
             </a:xfrm>
             <a:custGeom>
@@ -2701,7 +2701,7 @@
           </p:nvSpPr>
           <p:spPr>
             <a:xfrm>
-              <a:off x="6380746" y="2073503"/>
+              <a:off x="6371535" y="2073503"/>
               <a:ext cx="0" cy="3649639"/>
             </a:xfrm>
             <a:custGeom>
@@ -2744,7 +2744,7 @@
           </p:nvSpPr>
           <p:spPr>
             <a:xfrm>
-              <a:off x="7220382" y="2073503"/>
+              <a:off x="7209586" y="2073503"/>
               <a:ext cx="0" cy="3649639"/>
             </a:xfrm>
             <a:custGeom>
@@ -2787,7 +2787,7 @@
           </p:nvSpPr>
           <p:spPr>
             <a:xfrm>
-              <a:off x="8060018" y="2073503"/>
+              <a:off x="8047636" y="2073503"/>
               <a:ext cx="0" cy="3649639"/>
             </a:xfrm>
             <a:custGeom>
@@ -3045,7 +3045,7 @@
           </p:nvSpPr>
           <p:spPr>
             <a:xfrm>
-              <a:off x="923111" y="2073503"/>
+              <a:off x="924206" y="2073503"/>
               <a:ext cx="0" cy="3649639"/>
             </a:xfrm>
             <a:custGeom>
@@ -3088,7 +3088,7 @@
           </p:nvSpPr>
           <p:spPr>
             <a:xfrm>
-              <a:off x="1762747" y="2073503"/>
+              <a:off x="1762257" y="2073503"/>
               <a:ext cx="0" cy="3649639"/>
             </a:xfrm>
             <a:custGeom>
@@ -3131,7 +3131,7 @@
           </p:nvSpPr>
           <p:spPr>
             <a:xfrm>
-              <a:off x="2602383" y="2073503"/>
+              <a:off x="2600307" y="2073503"/>
               <a:ext cx="0" cy="3649639"/>
             </a:xfrm>
             <a:custGeom>
@@ -3174,7 +3174,7 @@
           </p:nvSpPr>
           <p:spPr>
             <a:xfrm>
-              <a:off x="3442019" y="2073503"/>
+              <a:off x="3438358" y="2073503"/>
               <a:ext cx="0" cy="3649639"/>
             </a:xfrm>
             <a:custGeom>
@@ -3217,7 +3217,7 @@
           </p:nvSpPr>
           <p:spPr>
             <a:xfrm>
-              <a:off x="4281656" y="2073503"/>
+              <a:off x="4276409" y="2073503"/>
               <a:ext cx="0" cy="3649639"/>
             </a:xfrm>
             <a:custGeom>
@@ -3260,7 +3260,7 @@
           </p:nvSpPr>
           <p:spPr>
             <a:xfrm>
-              <a:off x="5121292" y="2073503"/>
+              <a:off x="5114459" y="2073503"/>
               <a:ext cx="0" cy="3649639"/>
             </a:xfrm>
             <a:custGeom>
@@ -3303,7 +3303,7 @@
           </p:nvSpPr>
           <p:spPr>
             <a:xfrm>
-              <a:off x="5960928" y="2073503"/>
+              <a:off x="5952510" y="2073503"/>
               <a:ext cx="0" cy="3649639"/>
             </a:xfrm>
             <a:custGeom>
@@ -3346,7 +3346,7 @@
           </p:nvSpPr>
           <p:spPr>
             <a:xfrm>
-              <a:off x="6800564" y="2073503"/>
+              <a:off x="6790560" y="2073503"/>
               <a:ext cx="0" cy="3649639"/>
             </a:xfrm>
             <a:custGeom>
@@ -3389,7 +3389,7 @@
           </p:nvSpPr>
           <p:spPr>
             <a:xfrm>
-              <a:off x="7640200" y="2073503"/>
+              <a:off x="7628611" y="2073503"/>
               <a:ext cx="0" cy="3649639"/>
             </a:xfrm>
             <a:custGeom>
@@ -3432,7 +3432,7 @@
           </p:nvSpPr>
           <p:spPr>
             <a:xfrm>
-              <a:off x="8479836" y="2073503"/>
+              <a:off x="8466662" y="2073503"/>
               <a:ext cx="0" cy="3649639"/>
             </a:xfrm>
             <a:custGeom>
@@ -3476,506 +3476,503 @@
           <p:spPr>
             <a:xfrm>
               <a:off x="1172049" y="2073503"/>
-              <a:ext cx="7090630" cy="3483556"/>
+              <a:ext cx="7090630" cy="3483550"/>
             </a:xfrm>
             <a:custGeom>
               <a:avLst/>
               <a:pathLst>
-                <a:path w="7090630" h="3483556">
+                <a:path w="7090630" h="3483550">
                   <a:moveTo>
-                    <a:pt x="2569275" y="0"/>
+                    <a:pt x="2592538" y="0"/>
                   </a:moveTo>
                   <a:lnTo>
-                    <a:pt x="2578410" y="73160"/>
-                  </a:lnTo>
-                  <a:lnTo>
-                    <a:pt x="2650033" y="564150"/>
-                  </a:lnTo>
-                  <a:lnTo>
-                    <a:pt x="2721655" y="984457"/>
-                  </a:lnTo>
-                  <a:lnTo>
-                    <a:pt x="2793278" y="1344257"/>
-                  </a:lnTo>
-                  <a:lnTo>
-                    <a:pt x="2864901" y="1652259"/>
-                  </a:lnTo>
-                  <a:lnTo>
-                    <a:pt x="2936523" y="1915921"/>
-                  </a:lnTo>
-                  <a:lnTo>
-                    <a:pt x="3008146" y="2141626"/>
-                  </a:lnTo>
-                  <a:lnTo>
-                    <a:pt x="3079768" y="2334839"/>
-                  </a:lnTo>
-                  <a:lnTo>
-                    <a:pt x="3151391" y="2500237"/>
-                  </a:lnTo>
-                  <a:lnTo>
-                    <a:pt x="3223013" y="2641823"/>
-                  </a:lnTo>
-                  <a:lnTo>
-                    <a:pt x="3294636" y="2645013"/>
-                  </a:lnTo>
-                  <a:lnTo>
-                    <a:pt x="3366258" y="2634639"/>
-                  </a:lnTo>
-                  <a:lnTo>
-                    <a:pt x="3437881" y="2624136"/>
-                  </a:lnTo>
-                  <a:lnTo>
-                    <a:pt x="3509503" y="2613504"/>
-                  </a:lnTo>
-                  <a:lnTo>
-                    <a:pt x="3581126" y="2602740"/>
-                  </a:lnTo>
-                  <a:lnTo>
-                    <a:pt x="3652748" y="2591842"/>
-                  </a:lnTo>
-                  <a:lnTo>
-                    <a:pt x="3724371" y="2580810"/>
-                  </a:lnTo>
-                  <a:lnTo>
-                    <a:pt x="3795993" y="2569642"/>
-                  </a:lnTo>
-                  <a:lnTo>
-                    <a:pt x="3867616" y="2558336"/>
-                  </a:lnTo>
-                  <a:lnTo>
-                    <a:pt x="3939238" y="2546889"/>
-                  </a:lnTo>
-                  <a:lnTo>
-                    <a:pt x="4010861" y="2535301"/>
-                  </a:lnTo>
-                  <a:lnTo>
-                    <a:pt x="4082483" y="2523570"/>
-                  </a:lnTo>
-                  <a:lnTo>
-                    <a:pt x="4154106" y="2511694"/>
-                  </a:lnTo>
-                  <a:lnTo>
-                    <a:pt x="4225729" y="2499670"/>
-                  </a:lnTo>
-                  <a:lnTo>
-                    <a:pt x="4297351" y="2487498"/>
-                  </a:lnTo>
-                  <a:lnTo>
-                    <a:pt x="4368974" y="2475176"/>
-                  </a:lnTo>
-                  <a:lnTo>
-                    <a:pt x="4440596" y="2462701"/>
-                  </a:lnTo>
-                  <a:lnTo>
-                    <a:pt x="4512219" y="2450072"/>
-                  </a:lnTo>
-                  <a:lnTo>
-                    <a:pt x="4583841" y="2437286"/>
-                  </a:lnTo>
-                  <a:lnTo>
-                    <a:pt x="4655464" y="2424342"/>
-                  </a:lnTo>
-                  <a:lnTo>
-                    <a:pt x="4727086" y="2411239"/>
-                  </a:lnTo>
-                  <a:lnTo>
-                    <a:pt x="4798709" y="2397973"/>
-                  </a:lnTo>
-                  <a:lnTo>
-                    <a:pt x="4870331" y="2384543"/>
-                  </a:lnTo>
-                  <a:lnTo>
-                    <a:pt x="4941954" y="2370947"/>
-                  </a:lnTo>
-                  <a:lnTo>
-                    <a:pt x="5013576" y="2357183"/>
-                  </a:lnTo>
-                  <a:lnTo>
-                    <a:pt x="5085199" y="2343249"/>
-                  </a:lnTo>
-                  <a:lnTo>
-                    <a:pt x="5156821" y="2329142"/>
-                  </a:lnTo>
-                  <a:lnTo>
-                    <a:pt x="5228444" y="2314861"/>
-                  </a:lnTo>
-                  <a:lnTo>
-                    <a:pt x="5300066" y="2300403"/>
-                  </a:lnTo>
-                  <a:lnTo>
-                    <a:pt x="5371689" y="2285766"/>
-                  </a:lnTo>
-                  <a:lnTo>
-                    <a:pt x="5443311" y="2270948"/>
-                  </a:lnTo>
-                  <a:lnTo>
-                    <a:pt x="5514934" y="2255947"/>
-                  </a:lnTo>
-                  <a:lnTo>
-                    <a:pt x="5586557" y="2240760"/>
-                  </a:lnTo>
-                  <a:lnTo>
-                    <a:pt x="5658179" y="2225386"/>
-                  </a:lnTo>
-                  <a:lnTo>
-                    <a:pt x="5729802" y="2209821"/>
-                  </a:lnTo>
-                  <a:lnTo>
-                    <a:pt x="5801424" y="2194064"/>
-                  </a:lnTo>
-                  <a:lnTo>
-                    <a:pt x="5873047" y="2178112"/>
-                  </a:lnTo>
-                  <a:lnTo>
-                    <a:pt x="5944669" y="2161963"/>
-                  </a:lnTo>
-                  <a:lnTo>
-                    <a:pt x="6016292" y="2145614"/>
-                  </a:lnTo>
-                  <a:lnTo>
-                    <a:pt x="6087914" y="2129063"/>
-                  </a:lnTo>
-                  <a:lnTo>
-                    <a:pt x="6159537" y="2112307"/>
-                  </a:lnTo>
-                  <a:lnTo>
-                    <a:pt x="6231159" y="2095343"/>
-                  </a:lnTo>
-                  <a:lnTo>
-                    <a:pt x="6302782" y="2078170"/>
-                  </a:lnTo>
-                  <a:lnTo>
-                    <a:pt x="6374404" y="2060785"/>
-                  </a:lnTo>
-                  <a:lnTo>
-                    <a:pt x="6446027" y="2043184"/>
-                  </a:lnTo>
-                  <a:lnTo>
-                    <a:pt x="6517649" y="2025366"/>
-                  </a:lnTo>
-                  <a:lnTo>
-                    <a:pt x="6589272" y="2007327"/>
-                  </a:lnTo>
-                  <a:lnTo>
-                    <a:pt x="6660894" y="1989066"/>
-                  </a:lnTo>
-                  <a:lnTo>
-                    <a:pt x="6732517" y="1970578"/>
-                  </a:lnTo>
-                  <a:lnTo>
-                    <a:pt x="6804139" y="1951862"/>
-                  </a:lnTo>
-                  <a:lnTo>
-                    <a:pt x="6875762" y="1932914"/>
-                  </a:lnTo>
-                  <a:lnTo>
-                    <a:pt x="6947385" y="1913732"/>
-                  </a:lnTo>
-                  <a:lnTo>
-                    <a:pt x="7019007" y="1894312"/>
-                  </a:lnTo>
-                  <a:lnTo>
-                    <a:pt x="7090630" y="1874653"/>
-                  </a:lnTo>
-                  <a:lnTo>
-                    <a:pt x="7090630" y="3483556"/>
-                  </a:lnTo>
-                  <a:lnTo>
-                    <a:pt x="7019007" y="3483524"/>
-                  </a:lnTo>
-                  <a:lnTo>
-                    <a:pt x="6947385" y="3483486"/>
-                  </a:lnTo>
-                  <a:lnTo>
-                    <a:pt x="6875762" y="3483443"/>
-                  </a:lnTo>
-                  <a:lnTo>
-                    <a:pt x="6804139" y="3483392"/>
-                  </a:lnTo>
-                  <a:lnTo>
-                    <a:pt x="6732517" y="3483332"/>
-                  </a:lnTo>
-                  <a:lnTo>
-                    <a:pt x="6660894" y="3483262"/>
-                  </a:lnTo>
-                  <a:lnTo>
-                    <a:pt x="6589272" y="3483181"/>
-                  </a:lnTo>
-                  <a:lnTo>
-                    <a:pt x="6517649" y="3483086"/>
-                  </a:lnTo>
-                  <a:lnTo>
-                    <a:pt x="6446027" y="3482975"/>
-                  </a:lnTo>
-                  <a:lnTo>
-                    <a:pt x="6374404" y="3482845"/>
-                  </a:lnTo>
-                  <a:lnTo>
-                    <a:pt x="6302782" y="3482693"/>
-                  </a:lnTo>
-                  <a:lnTo>
-                    <a:pt x="6231159" y="3482516"/>
-                  </a:lnTo>
-                  <a:lnTo>
-                    <a:pt x="6159537" y="3482309"/>
-                  </a:lnTo>
-                  <a:lnTo>
-                    <a:pt x="6087914" y="3482068"/>
-                  </a:lnTo>
-                  <a:lnTo>
-                    <a:pt x="6016292" y="3481785"/>
-                  </a:lnTo>
-                  <a:lnTo>
-                    <a:pt x="5944669" y="3481455"/>
-                  </a:lnTo>
-                  <a:lnTo>
-                    <a:pt x="5873047" y="3481070"/>
-                  </a:lnTo>
-                  <a:lnTo>
-                    <a:pt x="5801424" y="3480620"/>
-                  </a:lnTo>
-                  <a:lnTo>
-                    <a:pt x="5729802" y="3480094"/>
-                  </a:lnTo>
-                  <a:lnTo>
-                    <a:pt x="5658179" y="3479480"/>
-                  </a:lnTo>
-                  <a:lnTo>
-                    <a:pt x="5586557" y="3478763"/>
-                  </a:lnTo>
-                  <a:lnTo>
-                    <a:pt x="5514934" y="3477924"/>
-                  </a:lnTo>
-                  <a:lnTo>
-                    <a:pt x="5443311" y="3476945"/>
-                  </a:lnTo>
-                  <a:lnTo>
-                    <a:pt x="5371689" y="3475802"/>
-                  </a:lnTo>
-                  <a:lnTo>
-                    <a:pt x="5300066" y="3474466"/>
-                  </a:lnTo>
-                  <a:lnTo>
-                    <a:pt x="5228444" y="3472905"/>
-                  </a:lnTo>
-                  <a:lnTo>
-                    <a:pt x="5156821" y="3471081"/>
-                  </a:lnTo>
-                  <a:lnTo>
-                    <a:pt x="5085199" y="3468952"/>
-                  </a:lnTo>
-                  <a:lnTo>
-                    <a:pt x="5013576" y="3466464"/>
-                  </a:lnTo>
-                  <a:lnTo>
-                    <a:pt x="4941954" y="3463557"/>
-                  </a:lnTo>
-                  <a:lnTo>
-                    <a:pt x="4870331" y="3460162"/>
-                  </a:lnTo>
-                  <a:lnTo>
-                    <a:pt x="4798709" y="3456196"/>
-                  </a:lnTo>
-                  <a:lnTo>
-                    <a:pt x="4727086" y="3451562"/>
-                  </a:lnTo>
-                  <a:lnTo>
-                    <a:pt x="4655464" y="3446150"/>
-                  </a:lnTo>
-                  <a:lnTo>
-                    <a:pt x="4583841" y="3439827"/>
-                  </a:lnTo>
-                  <a:lnTo>
-                    <a:pt x="4512219" y="3432441"/>
-                  </a:lnTo>
-                  <a:lnTo>
-                    <a:pt x="4440596" y="3423813"/>
-                  </a:lnTo>
-                  <a:lnTo>
-                    <a:pt x="4368974" y="3413735"/>
-                  </a:lnTo>
-                  <a:lnTo>
-                    <a:pt x="4297351" y="3401961"/>
-                  </a:lnTo>
-                  <a:lnTo>
-                    <a:pt x="4225729" y="3388207"/>
-                  </a:lnTo>
-                  <a:lnTo>
-                    <a:pt x="4154106" y="3372140"/>
-                  </a:lnTo>
-                  <a:lnTo>
-                    <a:pt x="4082483" y="3353371"/>
-                  </a:lnTo>
-                  <a:lnTo>
-                    <a:pt x="4010861" y="3331445"/>
-                  </a:lnTo>
-                  <a:lnTo>
-                    <a:pt x="3939238" y="3305833"/>
-                  </a:lnTo>
-                  <a:lnTo>
-                    <a:pt x="3867616" y="3275913"/>
-                  </a:lnTo>
-                  <a:lnTo>
-                    <a:pt x="3795993" y="3240961"/>
-                  </a:lnTo>
-                  <a:lnTo>
-                    <a:pt x="3724371" y="3200132"/>
-                  </a:lnTo>
-                  <a:lnTo>
-                    <a:pt x="3652748" y="3152436"/>
-                  </a:lnTo>
-                  <a:lnTo>
-                    <a:pt x="3581126" y="3096720"/>
-                  </a:lnTo>
-                  <a:lnTo>
-                    <a:pt x="3509503" y="3031633"/>
-                  </a:lnTo>
-                  <a:lnTo>
-                    <a:pt x="3437881" y="2955601"/>
-                  </a:lnTo>
-                  <a:lnTo>
-                    <a:pt x="3366258" y="2866782"/>
-                  </a:lnTo>
-                  <a:lnTo>
-                    <a:pt x="3294636" y="2763027"/>
-                  </a:lnTo>
-                  <a:lnTo>
-                    <a:pt x="3223013" y="2655260"/>
-                  </a:lnTo>
-                  <a:lnTo>
-                    <a:pt x="3151391" y="2665383"/>
-                  </a:lnTo>
-                  <a:lnTo>
-                    <a:pt x="3079768" y="2675381"/>
-                  </a:lnTo>
-                  <a:lnTo>
-                    <a:pt x="3008146" y="2685258"/>
-                  </a:lnTo>
-                  <a:lnTo>
-                    <a:pt x="2936523" y="2695014"/>
-                  </a:lnTo>
-                  <a:lnTo>
-                    <a:pt x="2864901" y="2704650"/>
-                  </a:lnTo>
-                  <a:lnTo>
-                    <a:pt x="2793278" y="2714169"/>
-                  </a:lnTo>
-                  <a:lnTo>
-                    <a:pt x="2721655" y="2723572"/>
-                  </a:lnTo>
-                  <a:lnTo>
-                    <a:pt x="2650033" y="2732859"/>
-                  </a:lnTo>
-                  <a:lnTo>
-                    <a:pt x="2578410" y="2742033"/>
-                  </a:lnTo>
-                  <a:lnTo>
-                    <a:pt x="2506788" y="2751096"/>
-                  </a:lnTo>
-                  <a:lnTo>
-                    <a:pt x="2435165" y="2760047"/>
-                  </a:lnTo>
-                  <a:lnTo>
-                    <a:pt x="2363543" y="2768889"/>
-                  </a:lnTo>
-                  <a:lnTo>
-                    <a:pt x="2291920" y="2777623"/>
-                  </a:lnTo>
-                  <a:lnTo>
-                    <a:pt x="2220298" y="2786250"/>
-                  </a:lnTo>
-                  <a:lnTo>
-                    <a:pt x="2148675" y="2794772"/>
-                  </a:lnTo>
-                  <a:lnTo>
-                    <a:pt x="2077053" y="2803190"/>
-                  </a:lnTo>
-                  <a:lnTo>
-                    <a:pt x="2005430" y="2811505"/>
-                  </a:lnTo>
-                  <a:lnTo>
-                    <a:pt x="1933808" y="2819718"/>
-                  </a:lnTo>
-                  <a:lnTo>
-                    <a:pt x="1862185" y="2827831"/>
-                  </a:lnTo>
-                  <a:lnTo>
-                    <a:pt x="1790563" y="2835845"/>
-                  </a:lnTo>
-                  <a:lnTo>
-                    <a:pt x="1718940" y="2843761"/>
-                  </a:lnTo>
-                  <a:lnTo>
-                    <a:pt x="1647318" y="2851580"/>
-                  </a:lnTo>
-                  <a:lnTo>
-                    <a:pt x="1575695" y="2859304"/>
-                  </a:lnTo>
-                  <a:lnTo>
-                    <a:pt x="1504073" y="2866933"/>
-                  </a:lnTo>
-                  <a:lnTo>
-                    <a:pt x="1432450" y="2874469"/>
-                  </a:lnTo>
-                  <a:lnTo>
-                    <a:pt x="1360827" y="2881913"/>
-                  </a:lnTo>
-                  <a:lnTo>
-                    <a:pt x="1289205" y="2889267"/>
-                  </a:lnTo>
-                  <a:lnTo>
-                    <a:pt x="1217582" y="2896530"/>
-                  </a:lnTo>
-                  <a:lnTo>
-                    <a:pt x="1145960" y="2903704"/>
-                  </a:lnTo>
-                  <a:lnTo>
-                    <a:pt x="1074337" y="2910791"/>
-                  </a:lnTo>
-                  <a:lnTo>
-                    <a:pt x="1002715" y="2917791"/>
-                  </a:lnTo>
-                  <a:lnTo>
-                    <a:pt x="931092" y="2924706"/>
-                  </a:lnTo>
-                  <a:lnTo>
-                    <a:pt x="859470" y="2931536"/>
-                  </a:lnTo>
-                  <a:lnTo>
-                    <a:pt x="787847" y="2938283"/>
-                  </a:lnTo>
-                  <a:lnTo>
-                    <a:pt x="716225" y="2944948"/>
-                  </a:lnTo>
-                  <a:lnTo>
-                    <a:pt x="644602" y="2951531"/>
-                  </a:lnTo>
-                  <a:lnTo>
-                    <a:pt x="572980" y="2958033"/>
-                  </a:lnTo>
-                  <a:lnTo>
-                    <a:pt x="501357" y="2964456"/>
-                  </a:lnTo>
-                  <a:lnTo>
-                    <a:pt x="429735" y="2970801"/>
-                  </a:lnTo>
-                  <a:lnTo>
-                    <a:pt x="358112" y="2977068"/>
-                  </a:lnTo>
-                  <a:lnTo>
-                    <a:pt x="286490" y="2983258"/>
-                  </a:lnTo>
-                  <a:lnTo>
-                    <a:pt x="214867" y="2989373"/>
-                  </a:lnTo>
-                  <a:lnTo>
-                    <a:pt x="143245" y="2995413"/>
-                  </a:lnTo>
-                  <a:lnTo>
-                    <a:pt x="71622" y="3001380"/>
-                  </a:lnTo>
-                  <a:lnTo>
-                    <a:pt x="0" y="3007273"/>
+                    <a:pt x="2650033" y="415106"/>
+                  </a:lnTo>
+                  <a:lnTo>
+                    <a:pt x="2721655" y="857642"/>
+                  </a:lnTo>
+                  <a:lnTo>
+                    <a:pt x="2793278" y="1236359"/>
+                  </a:lnTo>
+                  <a:lnTo>
+                    <a:pt x="2864901" y="1560460"/>
+                  </a:lnTo>
+                  <a:lnTo>
+                    <a:pt x="2936523" y="1837822"/>
+                  </a:lnTo>
+                  <a:lnTo>
+                    <a:pt x="3008146" y="2075185"/>
+                  </a:lnTo>
+                  <a:lnTo>
+                    <a:pt x="3079768" y="2278317"/>
+                  </a:lnTo>
+                  <a:lnTo>
+                    <a:pt x="3151391" y="2452155"/>
+                  </a:lnTo>
+                  <a:lnTo>
+                    <a:pt x="3223013" y="2600923"/>
+                  </a:lnTo>
+                  <a:lnTo>
+                    <a:pt x="3294636" y="2648134"/>
+                  </a:lnTo>
+                  <a:lnTo>
+                    <a:pt x="3366258" y="2637779"/>
+                  </a:lnTo>
+                  <a:lnTo>
+                    <a:pt x="3437881" y="2627295"/>
+                  </a:lnTo>
+                  <a:lnTo>
+                    <a:pt x="3509503" y="2616681"/>
+                  </a:lnTo>
+                  <a:lnTo>
+                    <a:pt x="3581126" y="2605936"/>
+                  </a:lnTo>
+                  <a:lnTo>
+                    <a:pt x="3652748" y="2595058"/>
+                  </a:lnTo>
+                  <a:lnTo>
+                    <a:pt x="3724371" y="2584045"/>
+                  </a:lnTo>
+                  <a:lnTo>
+                    <a:pt x="3795993" y="2572895"/>
+                  </a:lnTo>
+                  <a:lnTo>
+                    <a:pt x="3867616" y="2561608"/>
+                  </a:lnTo>
+                  <a:lnTo>
+                    <a:pt x="3939238" y="2550180"/>
+                  </a:lnTo>
+                  <a:lnTo>
+                    <a:pt x="4010861" y="2538611"/>
+                  </a:lnTo>
+                  <a:lnTo>
+                    <a:pt x="4082483" y="2526898"/>
+                  </a:lnTo>
+                  <a:lnTo>
+                    <a:pt x="4154106" y="2515040"/>
+                  </a:lnTo>
+                  <a:lnTo>
+                    <a:pt x="4225729" y="2503036"/>
+                  </a:lnTo>
+                  <a:lnTo>
+                    <a:pt x="4297351" y="2490882"/>
+                  </a:lnTo>
+                  <a:lnTo>
+                    <a:pt x="4368974" y="2478578"/>
+                  </a:lnTo>
+                  <a:lnTo>
+                    <a:pt x="4440596" y="2466121"/>
+                  </a:lnTo>
+                  <a:lnTo>
+                    <a:pt x="4512219" y="2453510"/>
+                  </a:lnTo>
+                  <a:lnTo>
+                    <a:pt x="4583841" y="2440743"/>
+                  </a:lnTo>
+                  <a:lnTo>
+                    <a:pt x="4655464" y="2427818"/>
+                  </a:lnTo>
+                  <a:lnTo>
+                    <a:pt x="4727086" y="2414732"/>
+                  </a:lnTo>
+                  <a:lnTo>
+                    <a:pt x="4798709" y="2401484"/>
+                  </a:lnTo>
+                  <a:lnTo>
+                    <a:pt x="4870331" y="2388072"/>
+                  </a:lnTo>
+                  <a:lnTo>
+                    <a:pt x="4941954" y="2374494"/>
+                  </a:lnTo>
+                  <a:lnTo>
+                    <a:pt x="5013576" y="2360748"/>
+                  </a:lnTo>
+                  <a:lnTo>
+                    <a:pt x="5085199" y="2346831"/>
+                  </a:lnTo>
+                  <a:lnTo>
+                    <a:pt x="5156821" y="2332742"/>
+                  </a:lnTo>
+                  <a:lnTo>
+                    <a:pt x="5228444" y="2318478"/>
+                  </a:lnTo>
+                  <a:lnTo>
+                    <a:pt x="5300066" y="2304037"/>
+                  </a:lnTo>
+                  <a:lnTo>
+                    <a:pt x="5371689" y="2289418"/>
+                  </a:lnTo>
+                  <a:lnTo>
+                    <a:pt x="5443311" y="2274617"/>
+                  </a:lnTo>
+                  <a:lnTo>
+                    <a:pt x="5514934" y="2259633"/>
+                  </a:lnTo>
+                  <a:lnTo>
+                    <a:pt x="5586557" y="2244463"/>
+                  </a:lnTo>
+                  <a:lnTo>
+                    <a:pt x="5658179" y="2229105"/>
+                  </a:lnTo>
+                  <a:lnTo>
+                    <a:pt x="5729802" y="2213557"/>
+                  </a:lnTo>
+                  <a:lnTo>
+                    <a:pt x="5801424" y="2197816"/>
+                  </a:lnTo>
+                  <a:lnTo>
+                    <a:pt x="5873047" y="2181880"/>
+                  </a:lnTo>
+                  <a:lnTo>
+                    <a:pt x="5944669" y="2165747"/>
+                  </a:lnTo>
+                  <a:lnTo>
+                    <a:pt x="6016292" y="2149413"/>
+                  </a:lnTo>
+                  <a:lnTo>
+                    <a:pt x="6087914" y="2132878"/>
+                  </a:lnTo>
+                  <a:lnTo>
+                    <a:pt x="6159537" y="2116137"/>
+                  </a:lnTo>
+                  <a:lnTo>
+                    <a:pt x="6231159" y="2099189"/>
+                  </a:lnTo>
+                  <a:lnTo>
+                    <a:pt x="6302782" y="2082031"/>
+                  </a:lnTo>
+                  <a:lnTo>
+                    <a:pt x="6374404" y="2064660"/>
+                  </a:lnTo>
+                  <a:lnTo>
+                    <a:pt x="6446027" y="2047074"/>
+                  </a:lnTo>
+                  <a:lnTo>
+                    <a:pt x="6517649" y="2029270"/>
+                  </a:lnTo>
+                  <a:lnTo>
+                    <a:pt x="6589272" y="2011245"/>
+                  </a:lnTo>
+                  <a:lnTo>
+                    <a:pt x="6660894" y="1992997"/>
+                  </a:lnTo>
+                  <a:lnTo>
+                    <a:pt x="6732517" y="1974523"/>
+                  </a:lnTo>
+                  <a:lnTo>
+                    <a:pt x="6804139" y="1955820"/>
+                  </a:lnTo>
+                  <a:lnTo>
+                    <a:pt x="6875762" y="1936885"/>
+                  </a:lnTo>
+                  <a:lnTo>
+                    <a:pt x="6947385" y="1917715"/>
+                  </a:lnTo>
+                  <a:lnTo>
+                    <a:pt x="7019007" y="1898308"/>
+                  </a:lnTo>
+                  <a:lnTo>
+                    <a:pt x="7090630" y="1878661"/>
+                  </a:lnTo>
+                  <a:lnTo>
+                    <a:pt x="7090630" y="3483550"/>
+                  </a:lnTo>
+                  <a:lnTo>
+                    <a:pt x="7019007" y="3483517"/>
+                  </a:lnTo>
+                  <a:lnTo>
+                    <a:pt x="6947385" y="3483478"/>
+                  </a:lnTo>
+                  <a:lnTo>
+                    <a:pt x="6875762" y="3483433"/>
+                  </a:lnTo>
+                  <a:lnTo>
+                    <a:pt x="6804139" y="3483380"/>
+                  </a:lnTo>
+                  <a:lnTo>
+                    <a:pt x="6732517" y="3483318"/>
+                  </a:lnTo>
+                  <a:lnTo>
+                    <a:pt x="6660894" y="3483246"/>
+                  </a:lnTo>
+                  <a:lnTo>
+                    <a:pt x="6589272" y="3483162"/>
+                  </a:lnTo>
+                  <a:lnTo>
+                    <a:pt x="6517649" y="3483063"/>
+                  </a:lnTo>
+                  <a:lnTo>
+                    <a:pt x="6446027" y="3482948"/>
+                  </a:lnTo>
+                  <a:lnTo>
+                    <a:pt x="6374404" y="3482813"/>
+                  </a:lnTo>
+                  <a:lnTo>
+                    <a:pt x="6302782" y="3482656"/>
+                  </a:lnTo>
+                  <a:lnTo>
+                    <a:pt x="6231159" y="3482472"/>
+                  </a:lnTo>
+                  <a:lnTo>
+                    <a:pt x="6159537" y="3482257"/>
+                  </a:lnTo>
+                  <a:lnTo>
+                    <a:pt x="6087914" y="3482007"/>
+                  </a:lnTo>
+                  <a:lnTo>
+                    <a:pt x="6016292" y="3481713"/>
+                  </a:lnTo>
+                  <a:lnTo>
+                    <a:pt x="5944669" y="3481371"/>
+                  </a:lnTo>
+                  <a:lnTo>
+                    <a:pt x="5873047" y="3480970"/>
+                  </a:lnTo>
+                  <a:lnTo>
+                    <a:pt x="5801424" y="3480503"/>
+                  </a:lnTo>
+                  <a:lnTo>
+                    <a:pt x="5729802" y="3479956"/>
+                  </a:lnTo>
+                  <a:lnTo>
+                    <a:pt x="5658179" y="3479317"/>
+                  </a:lnTo>
+                  <a:lnTo>
+                    <a:pt x="5586557" y="3478571"/>
+                  </a:lnTo>
+                  <a:lnTo>
+                    <a:pt x="5514934" y="3477699"/>
+                  </a:lnTo>
+                  <a:lnTo>
+                    <a:pt x="5443311" y="3476680"/>
+                  </a:lnTo>
+                  <a:lnTo>
+                    <a:pt x="5371689" y="3475489"/>
+                  </a:lnTo>
+                  <a:lnTo>
+                    <a:pt x="5300066" y="3474097"/>
+                  </a:lnTo>
+                  <a:lnTo>
+                    <a:pt x="5228444" y="3472471"/>
+                  </a:lnTo>
+                  <a:lnTo>
+                    <a:pt x="5156821" y="3470571"/>
+                  </a:lnTo>
+                  <a:lnTo>
+                    <a:pt x="5085199" y="3468351"/>
+                  </a:lnTo>
+                  <a:lnTo>
+                    <a:pt x="5013576" y="3465757"/>
+                  </a:lnTo>
+                  <a:lnTo>
+                    <a:pt x="4941954" y="3462725"/>
+                  </a:lnTo>
+                  <a:lnTo>
+                    <a:pt x="4870331" y="3459183"/>
+                  </a:lnTo>
+                  <a:lnTo>
+                    <a:pt x="4798709" y="3455044"/>
+                  </a:lnTo>
+                  <a:lnTo>
+                    <a:pt x="4727086" y="3450207"/>
+                  </a:lnTo>
+                  <a:lnTo>
+                    <a:pt x="4655464" y="3444555"/>
+                  </a:lnTo>
+                  <a:lnTo>
+                    <a:pt x="4583841" y="3437950"/>
+                  </a:lnTo>
+                  <a:lnTo>
+                    <a:pt x="4512219" y="3430233"/>
+                  </a:lnTo>
+                  <a:lnTo>
+                    <a:pt x="4440596" y="3421215"/>
+                  </a:lnTo>
+                  <a:lnTo>
+                    <a:pt x="4368974" y="3410678"/>
+                  </a:lnTo>
+                  <a:lnTo>
+                    <a:pt x="4297351" y="3398365"/>
+                  </a:lnTo>
+                  <a:lnTo>
+                    <a:pt x="4225729" y="3383977"/>
+                  </a:lnTo>
+                  <a:lnTo>
+                    <a:pt x="4154106" y="3367164"/>
+                  </a:lnTo>
+                  <a:lnTo>
+                    <a:pt x="4082483" y="3347519"/>
+                  </a:lnTo>
+                  <a:lnTo>
+                    <a:pt x="4010861" y="3324562"/>
+                  </a:lnTo>
+                  <a:lnTo>
+                    <a:pt x="3939238" y="3297738"/>
+                  </a:lnTo>
+                  <a:lnTo>
+                    <a:pt x="3867616" y="3266392"/>
+                  </a:lnTo>
+                  <a:lnTo>
+                    <a:pt x="3795993" y="3229765"/>
+                  </a:lnTo>
+                  <a:lnTo>
+                    <a:pt x="3724371" y="3186966"/>
+                  </a:lnTo>
+                  <a:lnTo>
+                    <a:pt x="3652748" y="3136954"/>
+                  </a:lnTo>
+                  <a:lnTo>
+                    <a:pt x="3581126" y="3078515"/>
+                  </a:lnTo>
+                  <a:lnTo>
+                    <a:pt x="3509503" y="3010227"/>
+                  </a:lnTo>
+                  <a:lnTo>
+                    <a:pt x="3437881" y="2930432"/>
+                  </a:lnTo>
+                  <a:lnTo>
+                    <a:pt x="3366258" y="2837191"/>
+                  </a:lnTo>
+                  <a:lnTo>
+                    <a:pt x="3294636" y="2728237"/>
+                  </a:lnTo>
+                  <a:lnTo>
+                    <a:pt x="3223013" y="2658363"/>
+                  </a:lnTo>
+                  <a:lnTo>
+                    <a:pt x="3151391" y="2668466"/>
+                  </a:lnTo>
+                  <a:lnTo>
+                    <a:pt x="3079768" y="2678446"/>
+                  </a:lnTo>
+                  <a:lnTo>
+                    <a:pt x="3008146" y="2688303"/>
+                  </a:lnTo>
+                  <a:lnTo>
+                    <a:pt x="2936523" y="2698040"/>
+                  </a:lnTo>
+                  <a:lnTo>
+                    <a:pt x="2864901" y="2707658"/>
+                  </a:lnTo>
+                  <a:lnTo>
+                    <a:pt x="2793278" y="2717158"/>
+                  </a:lnTo>
+                  <a:lnTo>
+                    <a:pt x="2721655" y="2726542"/>
+                  </a:lnTo>
+                  <a:lnTo>
+                    <a:pt x="2650033" y="2735810"/>
+                  </a:lnTo>
+                  <a:lnTo>
+                    <a:pt x="2578410" y="2744966"/>
+                  </a:lnTo>
+                  <a:lnTo>
+                    <a:pt x="2506788" y="2754009"/>
+                  </a:lnTo>
+                  <a:lnTo>
+                    <a:pt x="2435165" y="2762942"/>
+                  </a:lnTo>
+                  <a:lnTo>
+                    <a:pt x="2363543" y="2771765"/>
+                  </a:lnTo>
+                  <a:lnTo>
+                    <a:pt x="2291920" y="2780480"/>
+                  </a:lnTo>
+                  <a:lnTo>
+                    <a:pt x="2220298" y="2789089"/>
+                  </a:lnTo>
+                  <a:lnTo>
+                    <a:pt x="2148675" y="2797592"/>
+                  </a:lnTo>
+                  <a:lnTo>
+                    <a:pt x="2077053" y="2805991"/>
+                  </a:lnTo>
+                  <a:lnTo>
+                    <a:pt x="2005430" y="2814287"/>
+                  </a:lnTo>
+                  <a:lnTo>
+                    <a:pt x="1933808" y="2822482"/>
+                  </a:lnTo>
+                  <a:lnTo>
+                    <a:pt x="1862185" y="2830576"/>
+                  </a:lnTo>
+                  <a:lnTo>
+                    <a:pt x="1790563" y="2838572"/>
+                  </a:lnTo>
+                  <a:lnTo>
+                    <a:pt x="1718940" y="2846469"/>
+                  </a:lnTo>
+                  <a:lnTo>
+                    <a:pt x="1647318" y="2854270"/>
+                  </a:lnTo>
+                  <a:lnTo>
+                    <a:pt x="1575695" y="2861975"/>
+                  </a:lnTo>
+                  <a:lnTo>
+                    <a:pt x="1504073" y="2869586"/>
+                  </a:lnTo>
+                  <a:lnTo>
+                    <a:pt x="1432450" y="2877104"/>
+                  </a:lnTo>
+                  <a:lnTo>
+                    <a:pt x="1360827" y="2884530"/>
+                  </a:lnTo>
+                  <a:lnTo>
+                    <a:pt x="1289205" y="2891865"/>
+                  </a:lnTo>
+                  <a:lnTo>
+                    <a:pt x="1217582" y="2899110"/>
+                  </a:lnTo>
+                  <a:lnTo>
+                    <a:pt x="1145960" y="2906266"/>
+                  </a:lnTo>
+                  <a:lnTo>
+                    <a:pt x="1074337" y="2913335"/>
+                  </a:lnTo>
+                  <a:lnTo>
+                    <a:pt x="1002715" y="2920318"/>
+                  </a:lnTo>
+                  <a:lnTo>
+                    <a:pt x="931092" y="2927214"/>
+                  </a:lnTo>
+                  <a:lnTo>
+                    <a:pt x="859470" y="2934027"/>
+                  </a:lnTo>
+                  <a:lnTo>
+                    <a:pt x="787847" y="2940756"/>
+                  </a:lnTo>
+                  <a:lnTo>
+                    <a:pt x="716225" y="2947403"/>
+                  </a:lnTo>
+                  <a:lnTo>
+                    <a:pt x="644602" y="2953968"/>
+                  </a:lnTo>
+                  <a:lnTo>
+                    <a:pt x="572980" y="2960453"/>
+                  </a:lnTo>
+                  <a:lnTo>
+                    <a:pt x="501357" y="2966858"/>
+                  </a:lnTo>
+                  <a:lnTo>
+                    <a:pt x="429735" y="2973185"/>
+                  </a:lnTo>
+                  <a:lnTo>
+                    <a:pt x="358112" y="2979435"/>
+                  </a:lnTo>
+                  <a:lnTo>
+                    <a:pt x="286490" y="2985608"/>
+                  </a:lnTo>
+                  <a:lnTo>
+                    <a:pt x="214867" y="2991706"/>
+                  </a:lnTo>
+                  <a:lnTo>
+                    <a:pt x="143245" y="2997729"/>
+                  </a:lnTo>
+                  <a:lnTo>
+                    <a:pt x="71622" y="3003678"/>
+                  </a:lnTo>
+                  <a:lnTo>
+                    <a:pt x="0" y="3009555"/>
                   </a:lnTo>
                   <a:lnTo>
                     <a:pt x="0" y="0"/>
@@ -4004,207 +4001,204 @@
           </p:nvSpPr>
           <p:spPr>
             <a:xfrm>
-              <a:off x="3741324" y="2073503"/>
-              <a:ext cx="4521354" cy="2645013"/>
+              <a:off x="3764588" y="2073503"/>
+              <a:ext cx="4498091" cy="2648134"/>
             </a:xfrm>
             <a:custGeom>
               <a:avLst/>
               <a:pathLst>
-                <a:path w="4521354" h="2645013">
+                <a:path w="4498091" h="2648134">
                   <a:moveTo>
                     <a:pt x="0" y="0"/>
                   </a:moveTo>
                   <a:lnTo>
-                    <a:pt x="9135" y="73160"/>
-                  </a:lnTo>
-                  <a:lnTo>
-                    <a:pt x="80758" y="564150"/>
-                  </a:lnTo>
-                  <a:lnTo>
-                    <a:pt x="152380" y="984457"/>
-                  </a:lnTo>
-                  <a:lnTo>
-                    <a:pt x="224003" y="1344257"/>
-                  </a:lnTo>
-                  <a:lnTo>
-                    <a:pt x="295625" y="1652259"/>
-                  </a:lnTo>
-                  <a:lnTo>
-                    <a:pt x="367248" y="1915921"/>
-                  </a:lnTo>
-                  <a:lnTo>
-                    <a:pt x="438870" y="2141626"/>
-                  </a:lnTo>
-                  <a:lnTo>
-                    <a:pt x="510493" y="2334839"/>
-                  </a:lnTo>
-                  <a:lnTo>
-                    <a:pt x="582115" y="2500237"/>
-                  </a:lnTo>
-                  <a:lnTo>
-                    <a:pt x="653738" y="2641823"/>
-                  </a:lnTo>
-                  <a:lnTo>
-                    <a:pt x="725361" y="2645013"/>
-                  </a:lnTo>
-                  <a:lnTo>
-                    <a:pt x="796983" y="2634639"/>
-                  </a:lnTo>
-                  <a:lnTo>
-                    <a:pt x="868606" y="2624136"/>
-                  </a:lnTo>
-                  <a:lnTo>
-                    <a:pt x="940228" y="2613504"/>
-                  </a:lnTo>
-                  <a:lnTo>
-                    <a:pt x="1011851" y="2602740"/>
-                  </a:lnTo>
-                  <a:lnTo>
-                    <a:pt x="1083473" y="2591842"/>
-                  </a:lnTo>
-                  <a:lnTo>
-                    <a:pt x="1155096" y="2580810"/>
-                  </a:lnTo>
-                  <a:lnTo>
-                    <a:pt x="1226718" y="2569642"/>
-                  </a:lnTo>
-                  <a:lnTo>
-                    <a:pt x="1298341" y="2558336"/>
-                  </a:lnTo>
-                  <a:lnTo>
-                    <a:pt x="1369963" y="2546889"/>
-                  </a:lnTo>
-                  <a:lnTo>
-                    <a:pt x="1441586" y="2535301"/>
-                  </a:lnTo>
-                  <a:lnTo>
-                    <a:pt x="1513208" y="2523570"/>
-                  </a:lnTo>
-                  <a:lnTo>
-                    <a:pt x="1584831" y="2511694"/>
-                  </a:lnTo>
-                  <a:lnTo>
-                    <a:pt x="1656453" y="2499670"/>
-                  </a:lnTo>
-                  <a:lnTo>
-                    <a:pt x="1728076" y="2487498"/>
-                  </a:lnTo>
-                  <a:lnTo>
-                    <a:pt x="1799698" y="2475176"/>
-                  </a:lnTo>
-                  <a:lnTo>
-                    <a:pt x="1871321" y="2462701"/>
-                  </a:lnTo>
-                  <a:lnTo>
-                    <a:pt x="1942943" y="2450072"/>
-                  </a:lnTo>
-                  <a:lnTo>
-                    <a:pt x="2014566" y="2437286"/>
-                  </a:lnTo>
-                  <a:lnTo>
-                    <a:pt x="2086189" y="2424342"/>
-                  </a:lnTo>
-                  <a:lnTo>
-                    <a:pt x="2157811" y="2411239"/>
-                  </a:lnTo>
-                  <a:lnTo>
-                    <a:pt x="2229434" y="2397973"/>
-                  </a:lnTo>
-                  <a:lnTo>
-                    <a:pt x="2301056" y="2384543"/>
-                  </a:lnTo>
-                  <a:lnTo>
-                    <a:pt x="2372679" y="2370947"/>
-                  </a:lnTo>
-                  <a:lnTo>
-                    <a:pt x="2444301" y="2357183"/>
-                  </a:lnTo>
-                  <a:lnTo>
-                    <a:pt x="2515924" y="2343249"/>
-                  </a:lnTo>
-                  <a:lnTo>
-                    <a:pt x="2587546" y="2329142"/>
-                  </a:lnTo>
-                  <a:lnTo>
-                    <a:pt x="2659169" y="2314861"/>
-                  </a:lnTo>
-                  <a:lnTo>
-                    <a:pt x="2730791" y="2300403"/>
-                  </a:lnTo>
-                  <a:lnTo>
-                    <a:pt x="2802414" y="2285766"/>
-                  </a:lnTo>
-                  <a:lnTo>
-                    <a:pt x="2874036" y="2270948"/>
-                  </a:lnTo>
-                  <a:lnTo>
-                    <a:pt x="2945659" y="2255947"/>
-                  </a:lnTo>
-                  <a:lnTo>
-                    <a:pt x="3017281" y="2240760"/>
-                  </a:lnTo>
-                  <a:lnTo>
-                    <a:pt x="3088904" y="2225386"/>
-                  </a:lnTo>
-                  <a:lnTo>
-                    <a:pt x="3160526" y="2209821"/>
-                  </a:lnTo>
-                  <a:lnTo>
-                    <a:pt x="3232149" y="2194064"/>
-                  </a:lnTo>
-                  <a:lnTo>
-                    <a:pt x="3303771" y="2178112"/>
-                  </a:lnTo>
-                  <a:lnTo>
-                    <a:pt x="3375394" y="2161963"/>
-                  </a:lnTo>
-                  <a:lnTo>
-                    <a:pt x="3447017" y="2145614"/>
-                  </a:lnTo>
-                  <a:lnTo>
-                    <a:pt x="3518639" y="2129063"/>
-                  </a:lnTo>
-                  <a:lnTo>
-                    <a:pt x="3590262" y="2112307"/>
-                  </a:lnTo>
-                  <a:lnTo>
-                    <a:pt x="3661884" y="2095343"/>
-                  </a:lnTo>
-                  <a:lnTo>
-                    <a:pt x="3733507" y="2078170"/>
-                  </a:lnTo>
-                  <a:lnTo>
-                    <a:pt x="3805129" y="2060785"/>
-                  </a:lnTo>
-                  <a:lnTo>
-                    <a:pt x="3876752" y="2043184"/>
-                  </a:lnTo>
-                  <a:lnTo>
-                    <a:pt x="3948374" y="2025366"/>
-                  </a:lnTo>
-                  <a:lnTo>
-                    <a:pt x="4019997" y="2007327"/>
-                  </a:lnTo>
-                  <a:lnTo>
-                    <a:pt x="4091619" y="1989066"/>
-                  </a:lnTo>
-                  <a:lnTo>
-                    <a:pt x="4163242" y="1970578"/>
-                  </a:lnTo>
-                  <a:lnTo>
-                    <a:pt x="4234864" y="1951862"/>
-                  </a:lnTo>
-                  <a:lnTo>
-                    <a:pt x="4306487" y="1932914"/>
-                  </a:lnTo>
-                  <a:lnTo>
-                    <a:pt x="4378109" y="1913732"/>
-                  </a:lnTo>
-                  <a:lnTo>
-                    <a:pt x="4449732" y="1894312"/>
-                  </a:lnTo>
-                  <a:lnTo>
-                    <a:pt x="4521354" y="1874653"/>
+                    <a:pt x="57494" y="415106"/>
+                  </a:lnTo>
+                  <a:lnTo>
+                    <a:pt x="129117" y="857642"/>
+                  </a:lnTo>
+                  <a:lnTo>
+                    <a:pt x="200739" y="1236359"/>
+                  </a:lnTo>
+                  <a:lnTo>
+                    <a:pt x="272362" y="1560460"/>
+                  </a:lnTo>
+                  <a:lnTo>
+                    <a:pt x="343984" y="1837822"/>
+                  </a:lnTo>
+                  <a:lnTo>
+                    <a:pt x="415607" y="2075185"/>
+                  </a:lnTo>
+                  <a:lnTo>
+                    <a:pt x="487229" y="2278317"/>
+                  </a:lnTo>
+                  <a:lnTo>
+                    <a:pt x="558852" y="2452155"/>
+                  </a:lnTo>
+                  <a:lnTo>
+                    <a:pt x="630474" y="2600923"/>
+                  </a:lnTo>
+                  <a:lnTo>
+                    <a:pt x="702097" y="2648134"/>
+                  </a:lnTo>
+                  <a:lnTo>
+                    <a:pt x="773719" y="2637779"/>
+                  </a:lnTo>
+                  <a:lnTo>
+                    <a:pt x="845342" y="2627295"/>
+                  </a:lnTo>
+                  <a:lnTo>
+                    <a:pt x="916964" y="2616681"/>
+                  </a:lnTo>
+                  <a:lnTo>
+                    <a:pt x="988587" y="2605936"/>
+                  </a:lnTo>
+                  <a:lnTo>
+                    <a:pt x="1060209" y="2595058"/>
+                  </a:lnTo>
+                  <a:lnTo>
+                    <a:pt x="1131832" y="2584045"/>
+                  </a:lnTo>
+                  <a:lnTo>
+                    <a:pt x="1203454" y="2572895"/>
+                  </a:lnTo>
+                  <a:lnTo>
+                    <a:pt x="1275077" y="2561608"/>
+                  </a:lnTo>
+                  <a:lnTo>
+                    <a:pt x="1346700" y="2550180"/>
+                  </a:lnTo>
+                  <a:lnTo>
+                    <a:pt x="1418322" y="2538611"/>
+                  </a:lnTo>
+                  <a:lnTo>
+                    <a:pt x="1489945" y="2526898"/>
+                  </a:lnTo>
+                  <a:lnTo>
+                    <a:pt x="1561567" y="2515040"/>
+                  </a:lnTo>
+                  <a:lnTo>
+                    <a:pt x="1633190" y="2503036"/>
+                  </a:lnTo>
+                  <a:lnTo>
+                    <a:pt x="1704812" y="2490882"/>
+                  </a:lnTo>
+                  <a:lnTo>
+                    <a:pt x="1776435" y="2478578"/>
+                  </a:lnTo>
+                  <a:lnTo>
+                    <a:pt x="1848057" y="2466121"/>
+                  </a:lnTo>
+                  <a:lnTo>
+                    <a:pt x="1919680" y="2453510"/>
+                  </a:lnTo>
+                  <a:lnTo>
+                    <a:pt x="1991302" y="2440743"/>
+                  </a:lnTo>
+                  <a:lnTo>
+                    <a:pt x="2062925" y="2427818"/>
+                  </a:lnTo>
+                  <a:lnTo>
+                    <a:pt x="2134547" y="2414732"/>
+                  </a:lnTo>
+                  <a:lnTo>
+                    <a:pt x="2206170" y="2401484"/>
+                  </a:lnTo>
+                  <a:lnTo>
+                    <a:pt x="2277792" y="2388072"/>
+                  </a:lnTo>
+                  <a:lnTo>
+                    <a:pt x="2349415" y="2374494"/>
+                  </a:lnTo>
+                  <a:lnTo>
+                    <a:pt x="2421037" y="2360748"/>
+                  </a:lnTo>
+                  <a:lnTo>
+                    <a:pt x="2492660" y="2346831"/>
+                  </a:lnTo>
+                  <a:lnTo>
+                    <a:pt x="2564282" y="2332742"/>
+                  </a:lnTo>
+                  <a:lnTo>
+                    <a:pt x="2635905" y="2318478"/>
+                  </a:lnTo>
+                  <a:lnTo>
+                    <a:pt x="2707528" y="2304037"/>
+                  </a:lnTo>
+                  <a:lnTo>
+                    <a:pt x="2779150" y="2289418"/>
+                  </a:lnTo>
+                  <a:lnTo>
+                    <a:pt x="2850773" y="2274617"/>
+                  </a:lnTo>
+                  <a:lnTo>
+                    <a:pt x="2922395" y="2259633"/>
+                  </a:lnTo>
+                  <a:lnTo>
+                    <a:pt x="2994018" y="2244463"/>
+                  </a:lnTo>
+                  <a:lnTo>
+                    <a:pt x="3065640" y="2229105"/>
+                  </a:lnTo>
+                  <a:lnTo>
+                    <a:pt x="3137263" y="2213557"/>
+                  </a:lnTo>
+                  <a:lnTo>
+                    <a:pt x="3208885" y="2197816"/>
+                  </a:lnTo>
+                  <a:lnTo>
+                    <a:pt x="3280508" y="2181880"/>
+                  </a:lnTo>
+                  <a:lnTo>
+                    <a:pt x="3352130" y="2165747"/>
+                  </a:lnTo>
+                  <a:lnTo>
+                    <a:pt x="3423753" y="2149413"/>
+                  </a:lnTo>
+                  <a:lnTo>
+                    <a:pt x="3495375" y="2132878"/>
+                  </a:lnTo>
+                  <a:lnTo>
+                    <a:pt x="3566998" y="2116137"/>
+                  </a:lnTo>
+                  <a:lnTo>
+                    <a:pt x="3638620" y="2099189"/>
+                  </a:lnTo>
+                  <a:lnTo>
+                    <a:pt x="3710243" y="2082031"/>
+                  </a:lnTo>
+                  <a:lnTo>
+                    <a:pt x="3781865" y="2064660"/>
+                  </a:lnTo>
+                  <a:lnTo>
+                    <a:pt x="3853488" y="2047074"/>
+                  </a:lnTo>
+                  <a:lnTo>
+                    <a:pt x="3925110" y="2029270"/>
+                  </a:lnTo>
+                  <a:lnTo>
+                    <a:pt x="3996733" y="2011245"/>
+                  </a:lnTo>
+                  <a:lnTo>
+                    <a:pt x="4068355" y="1992997"/>
+                  </a:lnTo>
+                  <a:lnTo>
+                    <a:pt x="4139978" y="1974523"/>
+                  </a:lnTo>
+                  <a:lnTo>
+                    <a:pt x="4211601" y="1955820"/>
+                  </a:lnTo>
+                  <a:lnTo>
+                    <a:pt x="4283223" y="1936885"/>
+                  </a:lnTo>
+                  <a:lnTo>
+                    <a:pt x="4354846" y="1917715"/>
+                  </a:lnTo>
+                  <a:lnTo>
+                    <a:pt x="4426468" y="1898308"/>
+                  </a:lnTo>
+                  <a:lnTo>
+                    <a:pt x="4498091" y="1878661"/>
                   </a:lnTo>
                 </a:path>
               </a:pathLst>
@@ -4224,312 +4218,312 @@
           </p:nvSpPr>
           <p:spPr>
             <a:xfrm>
-              <a:off x="1172049" y="4728763"/>
-              <a:ext cx="7090630" cy="828295"/>
+              <a:off x="1172049" y="4731866"/>
+              <a:ext cx="7090630" cy="825187"/>
             </a:xfrm>
             <a:custGeom>
               <a:avLst/>
               <a:pathLst>
-                <a:path w="7090630" h="828295">
+                <a:path w="7090630" h="825187">
                   <a:moveTo>
-                    <a:pt x="7090630" y="828295"/>
+                    <a:pt x="7090630" y="825187"/>
                   </a:moveTo>
                   <a:lnTo>
-                    <a:pt x="7019007" y="828263"/>
-                  </a:lnTo>
-                  <a:lnTo>
-                    <a:pt x="6947385" y="828226"/>
-                  </a:lnTo>
-                  <a:lnTo>
-                    <a:pt x="6875762" y="828182"/>
-                  </a:lnTo>
-                  <a:lnTo>
-                    <a:pt x="6804139" y="828131"/>
-                  </a:lnTo>
-                  <a:lnTo>
-                    <a:pt x="6732517" y="828071"/>
-                  </a:lnTo>
-                  <a:lnTo>
-                    <a:pt x="6660894" y="828001"/>
-                  </a:lnTo>
-                  <a:lnTo>
-                    <a:pt x="6589272" y="827920"/>
-                  </a:lnTo>
-                  <a:lnTo>
-                    <a:pt x="6517649" y="827825"/>
-                  </a:lnTo>
-                  <a:lnTo>
-                    <a:pt x="6446027" y="827714"/>
-                  </a:lnTo>
-                  <a:lnTo>
-                    <a:pt x="6374404" y="827584"/>
-                  </a:lnTo>
-                  <a:lnTo>
-                    <a:pt x="6302782" y="827432"/>
-                  </a:lnTo>
-                  <a:lnTo>
-                    <a:pt x="6231159" y="827255"/>
-                  </a:lnTo>
-                  <a:lnTo>
-                    <a:pt x="6159537" y="827048"/>
-                  </a:lnTo>
-                  <a:lnTo>
-                    <a:pt x="6087914" y="826807"/>
-                  </a:lnTo>
-                  <a:lnTo>
-                    <a:pt x="6016292" y="826524"/>
-                  </a:lnTo>
-                  <a:lnTo>
-                    <a:pt x="5944669" y="826195"/>
-                  </a:lnTo>
-                  <a:lnTo>
-                    <a:pt x="5873047" y="825809"/>
-                  </a:lnTo>
-                  <a:lnTo>
-                    <a:pt x="5801424" y="825359"/>
-                  </a:lnTo>
-                  <a:lnTo>
-                    <a:pt x="5729802" y="824833"/>
-                  </a:lnTo>
-                  <a:lnTo>
-                    <a:pt x="5658179" y="824219"/>
-                  </a:lnTo>
-                  <a:lnTo>
-                    <a:pt x="5586557" y="823502"/>
-                  </a:lnTo>
-                  <a:lnTo>
-                    <a:pt x="5514934" y="822664"/>
-                  </a:lnTo>
-                  <a:lnTo>
-                    <a:pt x="5443311" y="821685"/>
-                  </a:lnTo>
-                  <a:lnTo>
-                    <a:pt x="5371689" y="820541"/>
-                  </a:lnTo>
-                  <a:lnTo>
-                    <a:pt x="5300066" y="819205"/>
-                  </a:lnTo>
-                  <a:lnTo>
-                    <a:pt x="5228444" y="817644"/>
-                  </a:lnTo>
-                  <a:lnTo>
-                    <a:pt x="5156821" y="815821"/>
-                  </a:lnTo>
-                  <a:lnTo>
-                    <a:pt x="5085199" y="813691"/>
-                  </a:lnTo>
-                  <a:lnTo>
-                    <a:pt x="5013576" y="811203"/>
-                  </a:lnTo>
-                  <a:lnTo>
-                    <a:pt x="4941954" y="808296"/>
-                  </a:lnTo>
-                  <a:lnTo>
-                    <a:pt x="4870331" y="804901"/>
-                  </a:lnTo>
-                  <a:lnTo>
-                    <a:pt x="4798709" y="800935"/>
-                  </a:lnTo>
-                  <a:lnTo>
-                    <a:pt x="4727086" y="796302"/>
-                  </a:lnTo>
-                  <a:lnTo>
-                    <a:pt x="4655464" y="790889"/>
-                  </a:lnTo>
-                  <a:lnTo>
-                    <a:pt x="4583841" y="784567"/>
-                  </a:lnTo>
-                  <a:lnTo>
-                    <a:pt x="4512219" y="777181"/>
-                  </a:lnTo>
-                  <a:lnTo>
-                    <a:pt x="4440596" y="768553"/>
-                  </a:lnTo>
-                  <a:lnTo>
-                    <a:pt x="4368974" y="758474"/>
-                  </a:lnTo>
-                  <a:lnTo>
-                    <a:pt x="4297351" y="746700"/>
-                  </a:lnTo>
-                  <a:lnTo>
-                    <a:pt x="4225729" y="732946"/>
-                  </a:lnTo>
-                  <a:lnTo>
-                    <a:pt x="4154106" y="716879"/>
-                  </a:lnTo>
-                  <a:lnTo>
-                    <a:pt x="4082483" y="698110"/>
-                  </a:lnTo>
-                  <a:lnTo>
-                    <a:pt x="4010861" y="676184"/>
-                  </a:lnTo>
-                  <a:lnTo>
-                    <a:pt x="3939238" y="650572"/>
-                  </a:lnTo>
-                  <a:lnTo>
-                    <a:pt x="3867616" y="620652"/>
-                  </a:lnTo>
-                  <a:lnTo>
-                    <a:pt x="3795993" y="585700"/>
-                  </a:lnTo>
-                  <a:lnTo>
-                    <a:pt x="3724371" y="544871"/>
-                  </a:lnTo>
-                  <a:lnTo>
-                    <a:pt x="3652748" y="497175"/>
-                  </a:lnTo>
-                  <a:lnTo>
-                    <a:pt x="3581126" y="441459"/>
-                  </a:lnTo>
-                  <a:lnTo>
-                    <a:pt x="3509503" y="376372"/>
-                  </a:lnTo>
-                  <a:lnTo>
-                    <a:pt x="3437881" y="300340"/>
-                  </a:lnTo>
-                  <a:lnTo>
-                    <a:pt x="3366258" y="211522"/>
-                  </a:lnTo>
-                  <a:lnTo>
-                    <a:pt x="3294636" y="107766"/>
+                    <a:pt x="7019007" y="825154"/>
+                  </a:lnTo>
+                  <a:lnTo>
+                    <a:pt x="6947385" y="825115"/>
+                  </a:lnTo>
+                  <a:lnTo>
+                    <a:pt x="6875762" y="825070"/>
+                  </a:lnTo>
+                  <a:lnTo>
+                    <a:pt x="6804139" y="825017"/>
+                  </a:lnTo>
+                  <a:lnTo>
+                    <a:pt x="6732517" y="824955"/>
+                  </a:lnTo>
+                  <a:lnTo>
+                    <a:pt x="6660894" y="824883"/>
+                  </a:lnTo>
+                  <a:lnTo>
+                    <a:pt x="6589272" y="824798"/>
+                  </a:lnTo>
+                  <a:lnTo>
+                    <a:pt x="6517649" y="824700"/>
+                  </a:lnTo>
+                  <a:lnTo>
+                    <a:pt x="6446027" y="824585"/>
+                  </a:lnTo>
+                  <a:lnTo>
+                    <a:pt x="6374404" y="824450"/>
+                  </a:lnTo>
+                  <a:lnTo>
+                    <a:pt x="6302782" y="824293"/>
+                  </a:lnTo>
+                  <a:lnTo>
+                    <a:pt x="6231159" y="824109"/>
+                  </a:lnTo>
+                  <a:lnTo>
+                    <a:pt x="6159537" y="823894"/>
+                  </a:lnTo>
+                  <a:lnTo>
+                    <a:pt x="6087914" y="823643"/>
+                  </a:lnTo>
+                  <a:lnTo>
+                    <a:pt x="6016292" y="823350"/>
+                  </a:lnTo>
+                  <a:lnTo>
+                    <a:pt x="5944669" y="823008"/>
+                  </a:lnTo>
+                  <a:lnTo>
+                    <a:pt x="5873047" y="822607"/>
+                  </a:lnTo>
+                  <a:lnTo>
+                    <a:pt x="5801424" y="822140"/>
+                  </a:lnTo>
+                  <a:lnTo>
+                    <a:pt x="5729802" y="821593"/>
+                  </a:lnTo>
+                  <a:lnTo>
+                    <a:pt x="5658179" y="820954"/>
+                  </a:lnTo>
+                  <a:lnTo>
+                    <a:pt x="5586557" y="820208"/>
+                  </a:lnTo>
+                  <a:lnTo>
+                    <a:pt x="5514934" y="819336"/>
+                  </a:lnTo>
+                  <a:lnTo>
+                    <a:pt x="5443311" y="818317"/>
+                  </a:lnTo>
+                  <a:lnTo>
+                    <a:pt x="5371689" y="817126"/>
+                  </a:lnTo>
+                  <a:lnTo>
+                    <a:pt x="5300066" y="815734"/>
+                  </a:lnTo>
+                  <a:lnTo>
+                    <a:pt x="5228444" y="814108"/>
+                  </a:lnTo>
+                  <a:lnTo>
+                    <a:pt x="5156821" y="812208"/>
+                  </a:lnTo>
+                  <a:lnTo>
+                    <a:pt x="5085199" y="809988"/>
+                  </a:lnTo>
+                  <a:lnTo>
+                    <a:pt x="5013576" y="807394"/>
+                  </a:lnTo>
+                  <a:lnTo>
+                    <a:pt x="4941954" y="804362"/>
+                  </a:lnTo>
+                  <a:lnTo>
+                    <a:pt x="4870331" y="800820"/>
+                  </a:lnTo>
+                  <a:lnTo>
+                    <a:pt x="4798709" y="796680"/>
+                  </a:lnTo>
+                  <a:lnTo>
+                    <a:pt x="4727086" y="791844"/>
+                  </a:lnTo>
+                  <a:lnTo>
+                    <a:pt x="4655464" y="786192"/>
+                  </a:lnTo>
+                  <a:lnTo>
+                    <a:pt x="4583841" y="779587"/>
+                  </a:lnTo>
+                  <a:lnTo>
+                    <a:pt x="4512219" y="771870"/>
+                  </a:lnTo>
+                  <a:lnTo>
+                    <a:pt x="4440596" y="762852"/>
+                  </a:lnTo>
+                  <a:lnTo>
+                    <a:pt x="4368974" y="752315"/>
+                  </a:lnTo>
+                  <a:lnTo>
+                    <a:pt x="4297351" y="740002"/>
+                  </a:lnTo>
+                  <a:lnTo>
+                    <a:pt x="4225729" y="725614"/>
+                  </a:lnTo>
+                  <a:lnTo>
+                    <a:pt x="4154106" y="708801"/>
+                  </a:lnTo>
+                  <a:lnTo>
+                    <a:pt x="4082483" y="689156"/>
+                  </a:lnTo>
+                  <a:lnTo>
+                    <a:pt x="4010861" y="666199"/>
+                  </a:lnTo>
+                  <a:lnTo>
+                    <a:pt x="3939238" y="639374"/>
+                  </a:lnTo>
+                  <a:lnTo>
+                    <a:pt x="3867616" y="608029"/>
+                  </a:lnTo>
+                  <a:lnTo>
+                    <a:pt x="3795993" y="571402"/>
+                  </a:lnTo>
+                  <a:lnTo>
+                    <a:pt x="3724371" y="528603"/>
+                  </a:lnTo>
+                  <a:lnTo>
+                    <a:pt x="3652748" y="478591"/>
+                  </a:lnTo>
+                  <a:lnTo>
+                    <a:pt x="3581126" y="420151"/>
+                  </a:lnTo>
+                  <a:lnTo>
+                    <a:pt x="3509503" y="351864"/>
+                  </a:lnTo>
+                  <a:lnTo>
+                    <a:pt x="3437881" y="272069"/>
+                  </a:lnTo>
+                  <a:lnTo>
+                    <a:pt x="3366258" y="178828"/>
+                  </a:lnTo>
+                  <a:lnTo>
+                    <a:pt x="3294636" y="69874"/>
                   </a:lnTo>
                   <a:lnTo>
                     <a:pt x="3223013" y="0"/>
                   </a:lnTo>
                   <a:lnTo>
-                    <a:pt x="3151391" y="10122"/>
-                  </a:lnTo>
-                  <a:lnTo>
-                    <a:pt x="3079768" y="20120"/>
-                  </a:lnTo>
-                  <a:lnTo>
-                    <a:pt x="3008146" y="29997"/>
-                  </a:lnTo>
-                  <a:lnTo>
-                    <a:pt x="2936523" y="39753"/>
-                  </a:lnTo>
-                  <a:lnTo>
-                    <a:pt x="2864901" y="49389"/>
-                  </a:lnTo>
-                  <a:lnTo>
-                    <a:pt x="2793278" y="58908"/>
-                  </a:lnTo>
-                  <a:lnTo>
-                    <a:pt x="2721655" y="68311"/>
-                  </a:lnTo>
-                  <a:lnTo>
-                    <a:pt x="2650033" y="77598"/>
-                  </a:lnTo>
-                  <a:lnTo>
-                    <a:pt x="2578410" y="86773"/>
-                  </a:lnTo>
-                  <a:lnTo>
-                    <a:pt x="2506788" y="95835"/>
-                  </a:lnTo>
-                  <a:lnTo>
-                    <a:pt x="2435165" y="104786"/>
-                  </a:lnTo>
-                  <a:lnTo>
-                    <a:pt x="2363543" y="113628"/>
-                  </a:lnTo>
-                  <a:lnTo>
-                    <a:pt x="2291920" y="122362"/>
-                  </a:lnTo>
-                  <a:lnTo>
-                    <a:pt x="2220298" y="130990"/>
-                  </a:lnTo>
-                  <a:lnTo>
-                    <a:pt x="2148675" y="139511"/>
-                  </a:lnTo>
-                  <a:lnTo>
-                    <a:pt x="2077053" y="147929"/>
-                  </a:lnTo>
-                  <a:lnTo>
-                    <a:pt x="2005430" y="156244"/>
-                  </a:lnTo>
-                  <a:lnTo>
-                    <a:pt x="1933808" y="164457"/>
-                  </a:lnTo>
-                  <a:lnTo>
-                    <a:pt x="1862185" y="172570"/>
-                  </a:lnTo>
-                  <a:lnTo>
-                    <a:pt x="1790563" y="180584"/>
-                  </a:lnTo>
-                  <a:lnTo>
-                    <a:pt x="1718940" y="188500"/>
-                  </a:lnTo>
-                  <a:lnTo>
-                    <a:pt x="1647318" y="196319"/>
-                  </a:lnTo>
-                  <a:lnTo>
-                    <a:pt x="1575695" y="204043"/>
-                  </a:lnTo>
-                  <a:lnTo>
-                    <a:pt x="1504073" y="211672"/>
-                  </a:lnTo>
-                  <a:lnTo>
-                    <a:pt x="1432450" y="219209"/>
-                  </a:lnTo>
-                  <a:lnTo>
-                    <a:pt x="1360827" y="226653"/>
-                  </a:lnTo>
-                  <a:lnTo>
-                    <a:pt x="1289205" y="234006"/>
-                  </a:lnTo>
-                  <a:lnTo>
-                    <a:pt x="1217582" y="241269"/>
-                  </a:lnTo>
-                  <a:lnTo>
-                    <a:pt x="1145960" y="248444"/>
-                  </a:lnTo>
-                  <a:lnTo>
-                    <a:pt x="1074337" y="255530"/>
-                  </a:lnTo>
-                  <a:lnTo>
-                    <a:pt x="1002715" y="262531"/>
-                  </a:lnTo>
-                  <a:lnTo>
-                    <a:pt x="931092" y="269445"/>
-                  </a:lnTo>
-                  <a:lnTo>
-                    <a:pt x="859470" y="276276"/>
-                  </a:lnTo>
-                  <a:lnTo>
-                    <a:pt x="787847" y="283022"/>
-                  </a:lnTo>
-                  <a:lnTo>
-                    <a:pt x="716225" y="289687"/>
-                  </a:lnTo>
-                  <a:lnTo>
-                    <a:pt x="644602" y="296270"/>
-                  </a:lnTo>
-                  <a:lnTo>
-                    <a:pt x="572980" y="302772"/>
-                  </a:lnTo>
-                  <a:lnTo>
-                    <a:pt x="501357" y="309195"/>
-                  </a:lnTo>
-                  <a:lnTo>
-                    <a:pt x="429735" y="315540"/>
-                  </a:lnTo>
-                  <a:lnTo>
-                    <a:pt x="358112" y="321807"/>
-                  </a:lnTo>
-                  <a:lnTo>
-                    <a:pt x="286490" y="327998"/>
-                  </a:lnTo>
-                  <a:lnTo>
-                    <a:pt x="214867" y="334112"/>
-                  </a:lnTo>
-                  <a:lnTo>
-                    <a:pt x="143245" y="340153"/>
-                  </a:lnTo>
-                  <a:lnTo>
-                    <a:pt x="71622" y="346119"/>
-                  </a:lnTo>
-                  <a:lnTo>
-                    <a:pt x="0" y="352012"/>
+                    <a:pt x="3151391" y="10103"/>
+                  </a:lnTo>
+                  <a:lnTo>
+                    <a:pt x="3079768" y="20083"/>
+                  </a:lnTo>
+                  <a:lnTo>
+                    <a:pt x="3008146" y="29940"/>
+                  </a:lnTo>
+                  <a:lnTo>
+                    <a:pt x="2936523" y="39677"/>
+                  </a:lnTo>
+                  <a:lnTo>
+                    <a:pt x="2864901" y="49295"/>
+                  </a:lnTo>
+                  <a:lnTo>
+                    <a:pt x="2793278" y="58795"/>
+                  </a:lnTo>
+                  <a:lnTo>
+                    <a:pt x="2721655" y="68178"/>
+                  </a:lnTo>
+                  <a:lnTo>
+                    <a:pt x="2650033" y="77447"/>
+                  </a:lnTo>
+                  <a:lnTo>
+                    <a:pt x="2578410" y="86603"/>
+                  </a:lnTo>
+                  <a:lnTo>
+                    <a:pt x="2506788" y="95646"/>
+                  </a:lnTo>
+                  <a:lnTo>
+                    <a:pt x="2435165" y="104578"/>
+                  </a:lnTo>
+                  <a:lnTo>
+                    <a:pt x="2363543" y="113402"/>
+                  </a:lnTo>
+                  <a:lnTo>
+                    <a:pt x="2291920" y="122117"/>
+                  </a:lnTo>
+                  <a:lnTo>
+                    <a:pt x="2220298" y="130726"/>
+                  </a:lnTo>
+                  <a:lnTo>
+                    <a:pt x="2148675" y="139229"/>
+                  </a:lnTo>
+                  <a:lnTo>
+                    <a:pt x="2077053" y="147628"/>
+                  </a:lnTo>
+                  <a:lnTo>
+                    <a:pt x="2005430" y="155924"/>
+                  </a:lnTo>
+                  <a:lnTo>
+                    <a:pt x="1933808" y="164119"/>
+                  </a:lnTo>
+                  <a:lnTo>
+                    <a:pt x="1862185" y="172213"/>
+                  </a:lnTo>
+                  <a:lnTo>
+                    <a:pt x="1790563" y="180209"/>
+                  </a:lnTo>
+                  <a:lnTo>
+                    <a:pt x="1718940" y="188106"/>
+                  </a:lnTo>
+                  <a:lnTo>
+                    <a:pt x="1647318" y="195907"/>
+                  </a:lnTo>
+                  <a:lnTo>
+                    <a:pt x="1575695" y="203612"/>
+                  </a:lnTo>
+                  <a:lnTo>
+                    <a:pt x="1504073" y="211223"/>
+                  </a:lnTo>
+                  <a:lnTo>
+                    <a:pt x="1432450" y="218741"/>
+                  </a:lnTo>
+                  <a:lnTo>
+                    <a:pt x="1360827" y="226167"/>
+                  </a:lnTo>
+                  <a:lnTo>
+                    <a:pt x="1289205" y="233502"/>
+                  </a:lnTo>
+                  <a:lnTo>
+                    <a:pt x="1217582" y="240747"/>
+                  </a:lnTo>
+                  <a:lnTo>
+                    <a:pt x="1145960" y="247903"/>
+                  </a:lnTo>
+                  <a:lnTo>
+                    <a:pt x="1074337" y="254972"/>
+                  </a:lnTo>
+                  <a:lnTo>
+                    <a:pt x="1002715" y="261954"/>
+                  </a:lnTo>
+                  <a:lnTo>
+                    <a:pt x="931092" y="268851"/>
+                  </a:lnTo>
+                  <a:lnTo>
+                    <a:pt x="859470" y="275664"/>
+                  </a:lnTo>
+                  <a:lnTo>
+                    <a:pt x="787847" y="282393"/>
+                  </a:lnTo>
+                  <a:lnTo>
+                    <a:pt x="716225" y="289039"/>
+                  </a:lnTo>
+                  <a:lnTo>
+                    <a:pt x="644602" y="295605"/>
+                  </a:lnTo>
+                  <a:lnTo>
+                    <a:pt x="572980" y="302090"/>
+                  </a:lnTo>
+                  <a:lnTo>
+                    <a:pt x="501357" y="308495"/>
+                  </a:lnTo>
+                  <a:lnTo>
+                    <a:pt x="429735" y="314822"/>
+                  </a:lnTo>
+                  <a:lnTo>
+                    <a:pt x="358112" y="321072"/>
+                  </a:lnTo>
+                  <a:lnTo>
+                    <a:pt x="286490" y="327245"/>
+                  </a:lnTo>
+                  <a:lnTo>
+                    <a:pt x="214867" y="333343"/>
+                  </a:lnTo>
+                  <a:lnTo>
+                    <a:pt x="143245" y="339366"/>
+                  </a:lnTo>
+                  <a:lnTo>
+                    <a:pt x="71622" y="345315"/>
+                  </a:lnTo>
+                  <a:lnTo>
+                    <a:pt x="0" y="351192"/>
                   </a:lnTo>
                 </a:path>
               </a:pathLst>
@@ -4549,237 +4543,237 @@
           </p:nvSpPr>
           <p:spPr>
             <a:xfrm>
-              <a:off x="2965966" y="2073503"/>
-              <a:ext cx="5296713" cy="3466238"/>
+              <a:off x="2990980" y="2073503"/>
+              <a:ext cx="5271698" cy="3465981"/>
             </a:xfrm>
             <a:custGeom>
               <a:avLst/>
               <a:pathLst>
-                <a:path w="5296713" h="3466238">
+                <a:path w="5271698" h="3465981">
                   <a:moveTo>
                     <a:pt x="0" y="0"/>
                   </a:moveTo>
                   <a:lnTo>
-                    <a:pt x="68268" y="230104"/>
-                  </a:lnTo>
-                  <a:lnTo>
-                    <a:pt x="139891" y="454838"/>
-                  </a:lnTo>
-                  <a:lnTo>
-                    <a:pt x="211513" y="664050"/>
-                  </a:lnTo>
-                  <a:lnTo>
-                    <a:pt x="283136" y="858811"/>
-                  </a:lnTo>
-                  <a:lnTo>
-                    <a:pt x="354758" y="1040120"/>
-                  </a:lnTo>
-                  <a:lnTo>
-                    <a:pt x="426381" y="1208905"/>
-                  </a:lnTo>
-                  <a:lnTo>
-                    <a:pt x="498003" y="1366032"/>
-                  </a:lnTo>
-                  <a:lnTo>
-                    <a:pt x="569626" y="1512306"/>
-                  </a:lnTo>
-                  <a:lnTo>
-                    <a:pt x="641248" y="1648477"/>
-                  </a:lnTo>
-                  <a:lnTo>
-                    <a:pt x="712871" y="1775242"/>
-                  </a:lnTo>
-                  <a:lnTo>
-                    <a:pt x="784493" y="1893251"/>
-                  </a:lnTo>
-                  <a:lnTo>
-                    <a:pt x="856116" y="2003109"/>
-                  </a:lnTo>
-                  <a:lnTo>
-                    <a:pt x="927738" y="2105379"/>
-                  </a:lnTo>
-                  <a:lnTo>
-                    <a:pt x="999361" y="2200585"/>
-                  </a:lnTo>
-                  <a:lnTo>
-                    <a:pt x="1070983" y="2289215"/>
-                  </a:lnTo>
-                  <a:lnTo>
-                    <a:pt x="1142606" y="2371723"/>
-                  </a:lnTo>
-                  <a:lnTo>
-                    <a:pt x="1214229" y="2448533"/>
-                  </a:lnTo>
-                  <a:lnTo>
-                    <a:pt x="1285851" y="2520037"/>
-                  </a:lnTo>
-                  <a:lnTo>
-                    <a:pt x="1357474" y="2586602"/>
-                  </a:lnTo>
-                  <a:lnTo>
-                    <a:pt x="1429096" y="2648569"/>
-                  </a:lnTo>
-                  <a:lnTo>
-                    <a:pt x="1500719" y="2706256"/>
-                  </a:lnTo>
-                  <a:lnTo>
-                    <a:pt x="1572341" y="2759958"/>
-                  </a:lnTo>
-                  <a:lnTo>
-                    <a:pt x="1643964" y="2809952"/>
-                  </a:lnTo>
-                  <a:lnTo>
-                    <a:pt x="1715586" y="2856492"/>
-                  </a:lnTo>
-                  <a:lnTo>
-                    <a:pt x="1787209" y="2899817"/>
-                  </a:lnTo>
-                  <a:lnTo>
-                    <a:pt x="1858831" y="2940150"/>
-                  </a:lnTo>
-                  <a:lnTo>
-                    <a:pt x="1930454" y="2977697"/>
-                  </a:lnTo>
-                  <a:lnTo>
-                    <a:pt x="2002076" y="3012651"/>
-                  </a:lnTo>
-                  <a:lnTo>
-                    <a:pt x="2073699" y="3045190"/>
-                  </a:lnTo>
-                  <a:lnTo>
-                    <a:pt x="2145321" y="3075482"/>
-                  </a:lnTo>
-                  <a:lnTo>
-                    <a:pt x="2216944" y="3103682"/>
-                  </a:lnTo>
-                  <a:lnTo>
-                    <a:pt x="2288566" y="3129933"/>
-                  </a:lnTo>
-                  <a:lnTo>
-                    <a:pt x="2360189" y="3154372"/>
-                  </a:lnTo>
-                  <a:lnTo>
-                    <a:pt x="2431811" y="3177122"/>
-                  </a:lnTo>
-                  <a:lnTo>
-                    <a:pt x="2503434" y="3198301"/>
-                  </a:lnTo>
-                  <a:lnTo>
-                    <a:pt x="2575057" y="3218017"/>
-                  </a:lnTo>
-                  <a:lnTo>
-                    <a:pt x="2646679" y="3236372"/>
-                  </a:lnTo>
-                  <a:lnTo>
-                    <a:pt x="2718302" y="3253458"/>
-                  </a:lnTo>
-                  <a:lnTo>
-                    <a:pt x="2789924" y="3269365"/>
-                  </a:lnTo>
-                  <a:lnTo>
-                    <a:pt x="2861547" y="3284172"/>
-                  </a:lnTo>
-                  <a:lnTo>
-                    <a:pt x="2933169" y="3297957"/>
-                  </a:lnTo>
-                  <a:lnTo>
-                    <a:pt x="3004792" y="3310790"/>
-                  </a:lnTo>
-                  <a:lnTo>
-                    <a:pt x="3076414" y="3322736"/>
-                  </a:lnTo>
-                  <a:lnTo>
-                    <a:pt x="3148037" y="3333858"/>
-                  </a:lnTo>
-                  <a:lnTo>
-                    <a:pt x="3219659" y="3344211"/>
-                  </a:lnTo>
-                  <a:lnTo>
-                    <a:pt x="3291282" y="3353849"/>
-                  </a:lnTo>
-                  <a:lnTo>
-                    <a:pt x="3362904" y="3362821"/>
-                  </a:lnTo>
-                  <a:lnTo>
-                    <a:pt x="3434527" y="3371173"/>
-                  </a:lnTo>
-                  <a:lnTo>
-                    <a:pt x="3506149" y="3378949"/>
-                  </a:lnTo>
-                  <a:lnTo>
-                    <a:pt x="3577772" y="3386188"/>
-                  </a:lnTo>
-                  <a:lnTo>
-                    <a:pt x="3649394" y="3392926"/>
-                  </a:lnTo>
-                  <a:lnTo>
-                    <a:pt x="3721017" y="3399199"/>
-                  </a:lnTo>
-                  <a:lnTo>
-                    <a:pt x="3792639" y="3405039"/>
-                  </a:lnTo>
-                  <a:lnTo>
-                    <a:pt x="3864262" y="3410475"/>
-                  </a:lnTo>
-                  <a:lnTo>
-                    <a:pt x="3935885" y="3415536"/>
-                  </a:lnTo>
-                  <a:lnTo>
-                    <a:pt x="4007507" y="3420248"/>
-                  </a:lnTo>
-                  <a:lnTo>
-                    <a:pt x="4079130" y="3424634"/>
-                  </a:lnTo>
-                  <a:lnTo>
-                    <a:pt x="4150752" y="3428717"/>
-                  </a:lnTo>
-                  <a:lnTo>
-                    <a:pt x="4222375" y="3432518"/>
-                  </a:lnTo>
-                  <a:lnTo>
-                    <a:pt x="4293997" y="3436056"/>
-                  </a:lnTo>
-                  <a:lnTo>
-                    <a:pt x="4365620" y="3439350"/>
-                  </a:lnTo>
-                  <a:lnTo>
-                    <a:pt x="4437242" y="3442417"/>
-                  </a:lnTo>
-                  <a:lnTo>
-                    <a:pt x="4508865" y="3445271"/>
-                  </a:lnTo>
-                  <a:lnTo>
-                    <a:pt x="4580487" y="3447929"/>
-                  </a:lnTo>
-                  <a:lnTo>
-                    <a:pt x="4652110" y="3450403"/>
-                  </a:lnTo>
-                  <a:lnTo>
-                    <a:pt x="4723732" y="3452706"/>
-                  </a:lnTo>
-                  <a:lnTo>
-                    <a:pt x="4795355" y="3454850"/>
-                  </a:lnTo>
-                  <a:lnTo>
-                    <a:pt x="4866977" y="3456846"/>
-                  </a:lnTo>
-                  <a:lnTo>
-                    <a:pt x="4938600" y="3458704"/>
-                  </a:lnTo>
-                  <a:lnTo>
-                    <a:pt x="5010222" y="3460434"/>
-                  </a:lnTo>
-                  <a:lnTo>
-                    <a:pt x="5081845" y="3462044"/>
-                  </a:lnTo>
-                  <a:lnTo>
-                    <a:pt x="5153467" y="3463543"/>
-                  </a:lnTo>
-                  <a:lnTo>
-                    <a:pt x="5225090" y="3464938"/>
-                  </a:lnTo>
-                  <a:lnTo>
-                    <a:pt x="5296713" y="3466238"/>
+                    <a:pt x="43254" y="149688"/>
+                  </a:lnTo>
+                  <a:lnTo>
+                    <a:pt x="114876" y="380397"/>
+                  </a:lnTo>
+                  <a:lnTo>
+                    <a:pt x="186499" y="595141"/>
+                  </a:lnTo>
+                  <a:lnTo>
+                    <a:pt x="258121" y="795026"/>
+                  </a:lnTo>
+                  <a:lnTo>
+                    <a:pt x="329744" y="981079"/>
+                  </a:lnTo>
+                  <a:lnTo>
+                    <a:pt x="401366" y="1154258"/>
+                  </a:lnTo>
+                  <a:lnTo>
+                    <a:pt x="472989" y="1315453"/>
+                  </a:lnTo>
+                  <a:lnTo>
+                    <a:pt x="544611" y="1465494"/>
+                  </a:lnTo>
+                  <a:lnTo>
+                    <a:pt x="616234" y="1605153"/>
+                  </a:lnTo>
+                  <a:lnTo>
+                    <a:pt x="687857" y="1735147"/>
+                  </a:lnTo>
+                  <a:lnTo>
+                    <a:pt x="759479" y="1856146"/>
+                  </a:lnTo>
+                  <a:lnTo>
+                    <a:pt x="831102" y="1968772"/>
+                  </a:lnTo>
+                  <a:lnTo>
+                    <a:pt x="902724" y="2073605"/>
+                  </a:lnTo>
+                  <a:lnTo>
+                    <a:pt x="974347" y="2171183"/>
+                  </a:lnTo>
+                  <a:lnTo>
+                    <a:pt x="1045969" y="2262010"/>
+                  </a:lnTo>
+                  <a:lnTo>
+                    <a:pt x="1117592" y="2346551"/>
+                  </a:lnTo>
+                  <a:lnTo>
+                    <a:pt x="1189214" y="2425242"/>
+                  </a:lnTo>
+                  <a:lnTo>
+                    <a:pt x="1260837" y="2498488"/>
+                  </a:lnTo>
+                  <a:lnTo>
+                    <a:pt x="1332459" y="2566666"/>
+                  </a:lnTo>
+                  <a:lnTo>
+                    <a:pt x="1404082" y="2630126"/>
+                  </a:lnTo>
+                  <a:lnTo>
+                    <a:pt x="1475704" y="2689194"/>
+                  </a:lnTo>
+                  <a:lnTo>
+                    <a:pt x="1547327" y="2744176"/>
+                  </a:lnTo>
+                  <a:lnTo>
+                    <a:pt x="1618949" y="2795352"/>
+                  </a:lnTo>
+                  <a:lnTo>
+                    <a:pt x="1690572" y="2842988"/>
+                  </a:lnTo>
+                  <a:lnTo>
+                    <a:pt x="1762194" y="2887327"/>
+                  </a:lnTo>
+                  <a:lnTo>
+                    <a:pt x="1833817" y="2928597"/>
+                  </a:lnTo>
+                  <a:lnTo>
+                    <a:pt x="1905439" y="2967012"/>
+                  </a:lnTo>
+                  <a:lnTo>
+                    <a:pt x="1977062" y="3002769"/>
+                  </a:lnTo>
+                  <a:lnTo>
+                    <a:pt x="2048685" y="3036052"/>
+                  </a:lnTo>
+                  <a:lnTo>
+                    <a:pt x="2120307" y="3067031"/>
+                  </a:lnTo>
+                  <a:lnTo>
+                    <a:pt x="2191930" y="3095867"/>
+                  </a:lnTo>
+                  <a:lnTo>
+                    <a:pt x="2263552" y="3122707"/>
+                  </a:lnTo>
+                  <a:lnTo>
+                    <a:pt x="2335175" y="3147690"/>
+                  </a:lnTo>
+                  <a:lnTo>
+                    <a:pt x="2406797" y="3170945"/>
+                  </a:lnTo>
+                  <a:lnTo>
+                    <a:pt x="2478420" y="3192590"/>
+                  </a:lnTo>
+                  <a:lnTo>
+                    <a:pt x="2550042" y="3212737"/>
+                  </a:lnTo>
+                  <a:lnTo>
+                    <a:pt x="2621665" y="3231490"/>
+                  </a:lnTo>
+                  <a:lnTo>
+                    <a:pt x="2693287" y="3248946"/>
+                  </a:lnTo>
+                  <a:lnTo>
+                    <a:pt x="2764910" y="3265194"/>
+                  </a:lnTo>
+                  <a:lnTo>
+                    <a:pt x="2836532" y="3280317"/>
+                  </a:lnTo>
+                  <a:lnTo>
+                    <a:pt x="2908155" y="3294394"/>
+                  </a:lnTo>
+                  <a:lnTo>
+                    <a:pt x="2979777" y="3307497"/>
+                  </a:lnTo>
+                  <a:lnTo>
+                    <a:pt x="3051400" y="3319693"/>
+                  </a:lnTo>
+                  <a:lnTo>
+                    <a:pt x="3123022" y="3331045"/>
+                  </a:lnTo>
+                  <a:lnTo>
+                    <a:pt x="3194645" y="3341611"/>
+                  </a:lnTo>
+                  <a:lnTo>
+                    <a:pt x="3266267" y="3351447"/>
+                  </a:lnTo>
+                  <a:lnTo>
+                    <a:pt x="3337890" y="3360602"/>
+                  </a:lnTo>
+                  <a:lnTo>
+                    <a:pt x="3409513" y="3369123"/>
+                  </a:lnTo>
+                  <a:lnTo>
+                    <a:pt x="3481135" y="3377055"/>
+                  </a:lnTo>
+                  <a:lnTo>
+                    <a:pt x="3552758" y="3384437"/>
+                  </a:lnTo>
+                  <a:lnTo>
+                    <a:pt x="3624380" y="3391309"/>
+                  </a:lnTo>
+                  <a:lnTo>
+                    <a:pt x="3696003" y="3397706"/>
+                  </a:lnTo>
+                  <a:lnTo>
+                    <a:pt x="3767625" y="3403660"/>
+                  </a:lnTo>
+                  <a:lnTo>
+                    <a:pt x="3839248" y="3409201"/>
+                  </a:lnTo>
+                  <a:lnTo>
+                    <a:pt x="3910870" y="3414360"/>
+                  </a:lnTo>
+                  <a:lnTo>
+                    <a:pt x="3982493" y="3419161"/>
+                  </a:lnTo>
+                  <a:lnTo>
+                    <a:pt x="4054115" y="3423630"/>
+                  </a:lnTo>
+                  <a:lnTo>
+                    <a:pt x="4125738" y="3427790"/>
+                  </a:lnTo>
+                  <a:lnTo>
+                    <a:pt x="4197360" y="3431662"/>
+                  </a:lnTo>
+                  <a:lnTo>
+                    <a:pt x="4268983" y="3435266"/>
+                  </a:lnTo>
+                  <a:lnTo>
+                    <a:pt x="4340605" y="3438621"/>
+                  </a:lnTo>
+                  <a:lnTo>
+                    <a:pt x="4412228" y="3441744"/>
+                  </a:lnTo>
+                  <a:lnTo>
+                    <a:pt x="4483850" y="3444650"/>
+                  </a:lnTo>
+                  <a:lnTo>
+                    <a:pt x="4555473" y="3447356"/>
+                  </a:lnTo>
+                  <a:lnTo>
+                    <a:pt x="4627095" y="3449874"/>
+                  </a:lnTo>
+                  <a:lnTo>
+                    <a:pt x="4698718" y="3452218"/>
+                  </a:lnTo>
+                  <a:lnTo>
+                    <a:pt x="4770341" y="3454399"/>
+                  </a:lnTo>
+                  <a:lnTo>
+                    <a:pt x="4841963" y="3456430"/>
+                  </a:lnTo>
+                  <a:lnTo>
+                    <a:pt x="4913586" y="3458320"/>
+                  </a:lnTo>
+                  <a:lnTo>
+                    <a:pt x="4985208" y="3460080"/>
+                  </a:lnTo>
+                  <a:lnTo>
+                    <a:pt x="5056831" y="3461717"/>
+                  </a:lnTo>
+                  <a:lnTo>
+                    <a:pt x="5128453" y="3463242"/>
+                  </a:lnTo>
+                  <a:lnTo>
+                    <a:pt x="5200076" y="3464661"/>
+                  </a:lnTo>
+                  <a:lnTo>
+                    <a:pt x="5271698" y="3465981"/>
                   </a:lnTo>
                 </a:path>
               </a:pathLst>
@@ -4851,7 +4845,7 @@
           </p:nvSpPr>
           <p:spPr>
             <a:xfrm>
-              <a:off x="4401933" y="2073503"/>
+              <a:off x="4423736" y="2073503"/>
               <a:ext cx="0" cy="3649639"/>
             </a:xfrm>
             <a:custGeom>
@@ -4894,7 +4888,7 @@
           </p:nvSpPr>
           <p:spPr>
             <a:xfrm>
-              <a:off x="3507589" y="2073503"/>
+              <a:off x="3470882" y="2073503"/>
               <a:ext cx="0" cy="3649639"/>
             </a:xfrm>
             <a:custGeom>
@@ -4937,7 +4931,7 @@
           </p:nvSpPr>
           <p:spPr>
             <a:xfrm>
-              <a:off x="5433405" y="2073503"/>
+              <a:off x="5437283" y="2073503"/>
               <a:ext cx="0" cy="3649639"/>
             </a:xfrm>
             <a:custGeom>
@@ -5210,7 +5204,7 @@
           </p:nvSpPr>
           <p:spPr>
             <a:xfrm>
-              <a:off x="842324" y="5785772"/>
+              <a:off x="843419" y="5785772"/>
               <a:ext cx="161574" cy="80101"/>
             </a:xfrm>
             <a:prstGeom prst="rect">
@@ -5256,7 +5250,7 @@
           </p:nvSpPr>
           <p:spPr>
             <a:xfrm>
-              <a:off x="1681960" y="5785772"/>
+              <a:off x="1681469" y="5785772"/>
               <a:ext cx="161574" cy="80101"/>
             </a:xfrm>
             <a:prstGeom prst="rect">
@@ -5302,7 +5296,7 @@
           </p:nvSpPr>
           <p:spPr>
             <a:xfrm>
-              <a:off x="2521596" y="5785772"/>
+              <a:off x="2519520" y="5785772"/>
               <a:ext cx="161574" cy="80101"/>
             </a:xfrm>
             <a:prstGeom prst="rect">
@@ -5348,7 +5342,7 @@
           </p:nvSpPr>
           <p:spPr>
             <a:xfrm>
-              <a:off x="3361232" y="5785772"/>
+              <a:off x="3357571" y="5785772"/>
               <a:ext cx="161574" cy="80101"/>
             </a:xfrm>
             <a:prstGeom prst="rect">
@@ -5394,7 +5388,7 @@
           </p:nvSpPr>
           <p:spPr>
             <a:xfrm>
-              <a:off x="4200868" y="5785772"/>
+              <a:off x="4195621" y="5785772"/>
               <a:ext cx="161574" cy="80101"/>
             </a:xfrm>
             <a:prstGeom prst="rect">
@@ -5440,7 +5434,7 @@
           </p:nvSpPr>
           <p:spPr>
             <a:xfrm>
-              <a:off x="5090202" y="5785772"/>
+              <a:off x="5083370" y="5785772"/>
               <a:ext cx="62179" cy="80101"/>
             </a:xfrm>
             <a:prstGeom prst="rect">
@@ -5486,7 +5480,7 @@
           </p:nvSpPr>
           <p:spPr>
             <a:xfrm>
-              <a:off x="5898749" y="5785772"/>
+              <a:off x="5890331" y="5785772"/>
               <a:ext cx="124358" cy="80101"/>
             </a:xfrm>
             <a:prstGeom prst="rect">
@@ -5532,7 +5526,7 @@
           </p:nvSpPr>
           <p:spPr>
             <a:xfrm>
-              <a:off x="6738385" y="5785772"/>
+              <a:off x="6728381" y="5785772"/>
               <a:ext cx="124358" cy="80101"/>
             </a:xfrm>
             <a:prstGeom prst="rect">
@@ -5578,7 +5572,7 @@
           </p:nvSpPr>
           <p:spPr>
             <a:xfrm>
-              <a:off x="7578021" y="5785772"/>
+              <a:off x="7566432" y="5785772"/>
               <a:ext cx="124358" cy="80101"/>
             </a:xfrm>
             <a:prstGeom prst="rect">
@@ -5624,7 +5618,7 @@
           </p:nvSpPr>
           <p:spPr>
             <a:xfrm>
-              <a:off x="8417657" y="5785772"/>
+              <a:off x="8404483" y="5785772"/>
               <a:ext cx="124358" cy="80101"/>
             </a:xfrm>
             <a:prstGeom prst="rect">
@@ -5795,7 +5789,7 @@
                   <a:latin typeface="Helvetica"/>
                   <a:cs typeface="Helvetica"/>
                 </a:rPr>
-                <a:t>subHR per 10 % decline: 2.31 (0.87-6.19), p_Bonf = 0.566 (n = 6)  |  per IQR decline (Δ = 22.9 %): 6.85 (0.72-65.33)  |  IQR: [-19.2, 3.7] %</a:t>
+                <a:t>subHR per 10 % decline: 2.31 (0.87-6.19), p_Bonf = 0.566 (n = 6)  |  per IQR decline (Δ = 23.5 %): 7.16 (0.71-71.93)  |  IQR: [-19.6, 3.9] %</a:t>
               </a:r>
             </a:p>
           </p:txBody>
